--- a/docs/pptx/carbo/ritu-carbo-linsubhr-ratio-akikdigo_10pct.pptx
+++ b/docs/pptx/carbo/ritu-carbo-linsubhr-ratio-akikdigo_10pct.pptx
@@ -2443,7 +2443,7 @@
           </p:nvSpPr>
           <p:spPr>
             <a:xfrm>
-              <a:off x="973953" y="2073503"/>
+              <a:off x="974732" y="2073503"/>
               <a:ext cx="0" cy="3649639"/>
             </a:xfrm>
             <a:custGeom>
@@ -2486,7 +2486,7 @@
           </p:nvSpPr>
           <p:spPr>
             <a:xfrm>
-              <a:off x="1881787" y="2073503"/>
+              <a:off x="1882345" y="2073503"/>
               <a:ext cx="0" cy="3649639"/>
             </a:xfrm>
             <a:custGeom>
@@ -2529,7 +2529,7 @@
           </p:nvSpPr>
           <p:spPr>
             <a:xfrm>
-              <a:off x="2789620" y="2073503"/>
+              <a:off x="2789957" y="2073503"/>
               <a:ext cx="0" cy="3649639"/>
             </a:xfrm>
             <a:custGeom>
@@ -2572,7 +2572,7 @@
           </p:nvSpPr>
           <p:spPr>
             <a:xfrm>
-              <a:off x="3697454" y="2073503"/>
+              <a:off x="3697570" y="2073503"/>
               <a:ext cx="0" cy="3649639"/>
             </a:xfrm>
             <a:custGeom>
@@ -2615,7 +2615,7 @@
           </p:nvSpPr>
           <p:spPr>
             <a:xfrm>
-              <a:off x="4605287" y="2073503"/>
+              <a:off x="4605182" y="2073503"/>
               <a:ext cx="0" cy="3649639"/>
             </a:xfrm>
             <a:custGeom>
@@ -2658,7 +2658,7 @@
           </p:nvSpPr>
           <p:spPr>
             <a:xfrm>
-              <a:off x="5513120" y="2073503"/>
+              <a:off x="5512795" y="2073503"/>
               <a:ext cx="0" cy="3649639"/>
             </a:xfrm>
             <a:custGeom>
@@ -2701,7 +2701,7 @@
           </p:nvSpPr>
           <p:spPr>
             <a:xfrm>
-              <a:off x="6420954" y="2073503"/>
+              <a:off x="6420407" y="2073503"/>
               <a:ext cx="0" cy="3649639"/>
             </a:xfrm>
             <a:custGeom>
@@ -2744,7 +2744,7 @@
           </p:nvSpPr>
           <p:spPr>
             <a:xfrm>
-              <a:off x="7328787" y="2073503"/>
+              <a:off x="7328020" y="2073503"/>
               <a:ext cx="0" cy="3649639"/>
             </a:xfrm>
             <a:custGeom>
@@ -2787,7 +2787,7 @@
           </p:nvSpPr>
           <p:spPr>
             <a:xfrm>
-              <a:off x="8236620" y="2073503"/>
+              <a:off x="8235632" y="2073503"/>
               <a:ext cx="0" cy="3649639"/>
             </a:xfrm>
             <a:custGeom>
@@ -3045,7 +3045,7 @@
           </p:nvSpPr>
           <p:spPr>
             <a:xfrm>
-              <a:off x="1427870" y="2073503"/>
+              <a:off x="1428538" y="2073503"/>
               <a:ext cx="0" cy="3649639"/>
             </a:xfrm>
             <a:custGeom>
@@ -3088,7 +3088,7 @@
           </p:nvSpPr>
           <p:spPr>
             <a:xfrm>
-              <a:off x="2335703" y="2073503"/>
+              <a:off x="2336151" y="2073503"/>
               <a:ext cx="0" cy="3649639"/>
             </a:xfrm>
             <a:custGeom>
@@ -3131,7 +3131,7 @@
           </p:nvSpPr>
           <p:spPr>
             <a:xfrm>
-              <a:off x="3243537" y="2073503"/>
+              <a:off x="3243764" y="2073503"/>
               <a:ext cx="0" cy="3649639"/>
             </a:xfrm>
             <a:custGeom>
@@ -3174,7 +3174,7 @@
           </p:nvSpPr>
           <p:spPr>
             <a:xfrm>
-              <a:off x="4151370" y="2073503"/>
+              <a:off x="4151376" y="2073503"/>
               <a:ext cx="0" cy="3649639"/>
             </a:xfrm>
             <a:custGeom>
@@ -3217,7 +3217,7 @@
           </p:nvSpPr>
           <p:spPr>
             <a:xfrm>
-              <a:off x="5059204" y="2073503"/>
+              <a:off x="5058989" y="2073503"/>
               <a:ext cx="0" cy="3649639"/>
             </a:xfrm>
             <a:custGeom>
@@ -3260,7 +3260,7 @@
           </p:nvSpPr>
           <p:spPr>
             <a:xfrm>
-              <a:off x="5967037" y="2073503"/>
+              <a:off x="5966601" y="2073503"/>
               <a:ext cx="0" cy="3649639"/>
             </a:xfrm>
             <a:custGeom>
@@ -3303,7 +3303,7 @@
           </p:nvSpPr>
           <p:spPr>
             <a:xfrm>
-              <a:off x="6874870" y="2073503"/>
+              <a:off x="6874214" y="2073503"/>
               <a:ext cx="0" cy="3649639"/>
             </a:xfrm>
             <a:custGeom>
@@ -3346,7 +3346,7 @@
           </p:nvSpPr>
           <p:spPr>
             <a:xfrm>
-              <a:off x="7782704" y="2073503"/>
+              <a:off x="7781826" y="2073503"/>
               <a:ext cx="0" cy="3649639"/>
             </a:xfrm>
             <a:custGeom>
@@ -3390,521 +3390,518 @@
           <p:spPr>
             <a:xfrm>
               <a:off x="1172049" y="2073503"/>
-              <a:ext cx="7090630" cy="3482673"/>
+              <a:ext cx="7090630" cy="3482630"/>
             </a:xfrm>
             <a:custGeom>
               <a:avLst/>
               <a:pathLst>
-                <a:path w="7090630" h="3482673">
+                <a:path w="7090630" h="3482630">
                   <a:moveTo>
-                    <a:pt x="2217473" y="0"/>
+                    <a:pt x="2242769" y="0"/>
                   </a:moveTo>
                   <a:lnTo>
-                    <a:pt x="2220298" y="17250"/>
-                  </a:lnTo>
-                  <a:lnTo>
-                    <a:pt x="2291920" y="405621"/>
-                  </a:lnTo>
-                  <a:lnTo>
-                    <a:pt x="2363543" y="750480"/>
-                  </a:lnTo>
-                  <a:lnTo>
-                    <a:pt x="2435165" y="1056703"/>
-                  </a:lnTo>
-                  <a:lnTo>
-                    <a:pt x="2506788" y="1328618"/>
-                  </a:lnTo>
-                  <a:lnTo>
-                    <a:pt x="2578410" y="1570069"/>
-                  </a:lnTo>
-                  <a:lnTo>
-                    <a:pt x="2650033" y="1784469"/>
-                  </a:lnTo>
-                  <a:lnTo>
-                    <a:pt x="2721655" y="1974849"/>
-                  </a:lnTo>
-                  <a:lnTo>
-                    <a:pt x="2793278" y="2143899"/>
-                  </a:lnTo>
-                  <a:lnTo>
-                    <a:pt x="2864901" y="2294010"/>
-                  </a:lnTo>
-                  <a:lnTo>
-                    <a:pt x="2936523" y="2427302"/>
-                  </a:lnTo>
-                  <a:lnTo>
-                    <a:pt x="3008146" y="2545662"/>
-                  </a:lnTo>
-                  <a:lnTo>
-                    <a:pt x="3079768" y="2650761"/>
-                  </a:lnTo>
-                  <a:lnTo>
-                    <a:pt x="3151391" y="2655311"/>
-                  </a:lnTo>
-                  <a:lnTo>
-                    <a:pt x="3223013" y="2656376"/>
-                  </a:lnTo>
-                  <a:lnTo>
-                    <a:pt x="3294636" y="2657439"/>
-                  </a:lnTo>
-                  <a:lnTo>
-                    <a:pt x="3366258" y="2658502"/>
-                  </a:lnTo>
-                  <a:lnTo>
-                    <a:pt x="3437881" y="2659562"/>
-                  </a:lnTo>
-                  <a:lnTo>
-                    <a:pt x="3509503" y="2660622"/>
-                  </a:lnTo>
-                  <a:lnTo>
-                    <a:pt x="3581126" y="2661680"/>
-                  </a:lnTo>
-                  <a:lnTo>
-                    <a:pt x="3652748" y="2662737"/>
-                  </a:lnTo>
-                  <a:lnTo>
-                    <a:pt x="3724371" y="2663792"/>
-                  </a:lnTo>
-                  <a:lnTo>
-                    <a:pt x="3795993" y="2664846"/>
-                  </a:lnTo>
-                  <a:lnTo>
-                    <a:pt x="3867616" y="2665898"/>
-                  </a:lnTo>
-                  <a:lnTo>
-                    <a:pt x="3939238" y="2666950"/>
-                  </a:lnTo>
-                  <a:lnTo>
-                    <a:pt x="4010861" y="2668000"/>
-                  </a:lnTo>
-                  <a:lnTo>
-                    <a:pt x="4082483" y="2669048"/>
-                  </a:lnTo>
-                  <a:lnTo>
-                    <a:pt x="4154106" y="2670095"/>
-                  </a:lnTo>
-                  <a:lnTo>
-                    <a:pt x="4225729" y="2671141"/>
-                  </a:lnTo>
-                  <a:lnTo>
-                    <a:pt x="4297351" y="2672186"/>
-                  </a:lnTo>
-                  <a:lnTo>
-                    <a:pt x="4368974" y="2673229"/>
-                  </a:lnTo>
-                  <a:lnTo>
-                    <a:pt x="4440596" y="2674271"/>
-                  </a:lnTo>
-                  <a:lnTo>
-                    <a:pt x="4512219" y="2675311"/>
-                  </a:lnTo>
-                  <a:lnTo>
-                    <a:pt x="4583841" y="2676351"/>
-                  </a:lnTo>
-                  <a:lnTo>
-                    <a:pt x="4655464" y="2677388"/>
-                  </a:lnTo>
-                  <a:lnTo>
-                    <a:pt x="4727086" y="2678425"/>
-                  </a:lnTo>
-                  <a:lnTo>
-                    <a:pt x="4798709" y="2679460"/>
-                  </a:lnTo>
-                  <a:lnTo>
-                    <a:pt x="4870331" y="2680494"/>
-                  </a:lnTo>
-                  <a:lnTo>
-                    <a:pt x="4941954" y="2681526"/>
-                  </a:lnTo>
-                  <a:lnTo>
-                    <a:pt x="5013576" y="2682558"/>
-                  </a:lnTo>
-                  <a:lnTo>
-                    <a:pt x="5085199" y="2683587"/>
-                  </a:lnTo>
-                  <a:lnTo>
-                    <a:pt x="5156821" y="2684616"/>
-                  </a:lnTo>
-                  <a:lnTo>
-                    <a:pt x="5228444" y="2685643"/>
-                  </a:lnTo>
-                  <a:lnTo>
-                    <a:pt x="5300066" y="2686669"/>
-                  </a:lnTo>
-                  <a:lnTo>
-                    <a:pt x="5371689" y="2687694"/>
-                  </a:lnTo>
-                  <a:lnTo>
-                    <a:pt x="5443311" y="2688717"/>
-                  </a:lnTo>
-                  <a:lnTo>
-                    <a:pt x="5514934" y="2689739"/>
-                  </a:lnTo>
-                  <a:lnTo>
-                    <a:pt x="5586557" y="2690759"/>
-                  </a:lnTo>
-                  <a:lnTo>
-                    <a:pt x="5658179" y="2691779"/>
-                  </a:lnTo>
-                  <a:lnTo>
-                    <a:pt x="5729802" y="2692797"/>
-                  </a:lnTo>
-                  <a:lnTo>
-                    <a:pt x="5801424" y="2693813"/>
-                  </a:lnTo>
-                  <a:lnTo>
-                    <a:pt x="5873047" y="2694829"/>
-                  </a:lnTo>
-                  <a:lnTo>
-                    <a:pt x="5944669" y="2695843"/>
-                  </a:lnTo>
-                  <a:lnTo>
-                    <a:pt x="6016292" y="2696856"/>
-                  </a:lnTo>
-                  <a:lnTo>
-                    <a:pt x="6087914" y="2697867"/>
-                  </a:lnTo>
-                  <a:lnTo>
-                    <a:pt x="6159537" y="2698877"/>
-                  </a:lnTo>
-                  <a:lnTo>
-                    <a:pt x="6231159" y="2699886"/>
-                  </a:lnTo>
-                  <a:lnTo>
-                    <a:pt x="6302782" y="2700894"/>
-                  </a:lnTo>
-                  <a:lnTo>
-                    <a:pt x="6374404" y="2701900"/>
-                  </a:lnTo>
-                  <a:lnTo>
-                    <a:pt x="6446027" y="2702905"/>
-                  </a:lnTo>
-                  <a:lnTo>
-                    <a:pt x="6517649" y="2703909"/>
-                  </a:lnTo>
-                  <a:lnTo>
-                    <a:pt x="6589272" y="2704911"/>
-                  </a:lnTo>
-                  <a:lnTo>
-                    <a:pt x="6660894" y="2705912"/>
-                  </a:lnTo>
-                  <a:lnTo>
-                    <a:pt x="6732517" y="2706912"/>
-                  </a:lnTo>
-                  <a:lnTo>
-                    <a:pt x="6804139" y="2707911"/>
-                  </a:lnTo>
-                  <a:lnTo>
-                    <a:pt x="6875762" y="2708908"/>
-                  </a:lnTo>
-                  <a:lnTo>
-                    <a:pt x="6947385" y="2709904"/>
-                  </a:lnTo>
-                  <a:lnTo>
-                    <a:pt x="7019007" y="2710899"/>
-                  </a:lnTo>
-                  <a:lnTo>
-                    <a:pt x="7090630" y="2711892"/>
-                  </a:lnTo>
-                  <a:lnTo>
-                    <a:pt x="7090630" y="3482673"/>
-                  </a:lnTo>
-                  <a:lnTo>
-                    <a:pt x="7019007" y="3482537"/>
-                  </a:lnTo>
-                  <a:lnTo>
-                    <a:pt x="6947385" y="3482385"/>
-                  </a:lnTo>
-                  <a:lnTo>
-                    <a:pt x="6875762" y="3482213"/>
-                  </a:lnTo>
-                  <a:lnTo>
-                    <a:pt x="6804139" y="3482020"/>
-                  </a:lnTo>
-                  <a:lnTo>
-                    <a:pt x="6732517" y="3481802"/>
-                  </a:lnTo>
-                  <a:lnTo>
-                    <a:pt x="6660894" y="3481557"/>
-                  </a:lnTo>
-                  <a:lnTo>
-                    <a:pt x="6589272" y="3481280"/>
-                  </a:lnTo>
-                  <a:lnTo>
-                    <a:pt x="6517649" y="3480969"/>
-                  </a:lnTo>
-                  <a:lnTo>
-                    <a:pt x="6446027" y="3480619"/>
-                  </a:lnTo>
-                  <a:lnTo>
-                    <a:pt x="6374404" y="3480224"/>
-                  </a:lnTo>
-                  <a:lnTo>
-                    <a:pt x="6302782" y="3479780"/>
-                  </a:lnTo>
-                  <a:lnTo>
-                    <a:pt x="6231159" y="3479279"/>
-                  </a:lnTo>
-                  <a:lnTo>
-                    <a:pt x="6159537" y="3478715"/>
-                  </a:lnTo>
-                  <a:lnTo>
-                    <a:pt x="6087914" y="3478081"/>
-                  </a:lnTo>
-                  <a:lnTo>
-                    <a:pt x="6016292" y="3477366"/>
-                  </a:lnTo>
-                  <a:lnTo>
-                    <a:pt x="5944669" y="3476561"/>
-                  </a:lnTo>
-                  <a:lnTo>
-                    <a:pt x="5873047" y="3475654"/>
-                  </a:lnTo>
-                  <a:lnTo>
-                    <a:pt x="5801424" y="3474633"/>
-                  </a:lnTo>
-                  <a:lnTo>
-                    <a:pt x="5729802" y="3473483"/>
-                  </a:lnTo>
-                  <a:lnTo>
-                    <a:pt x="5658179" y="3472189"/>
-                  </a:lnTo>
-                  <a:lnTo>
-                    <a:pt x="5586557" y="3470730"/>
-                  </a:lnTo>
-                  <a:lnTo>
-                    <a:pt x="5514934" y="3469088"/>
-                  </a:lnTo>
-                  <a:lnTo>
-                    <a:pt x="5443311" y="3467239"/>
-                  </a:lnTo>
-                  <a:lnTo>
-                    <a:pt x="5371689" y="3465156"/>
-                  </a:lnTo>
-                  <a:lnTo>
-                    <a:pt x="5300066" y="3462810"/>
-                  </a:lnTo>
-                  <a:lnTo>
-                    <a:pt x="5228444" y="3460169"/>
-                  </a:lnTo>
-                  <a:lnTo>
-                    <a:pt x="5156821" y="3457194"/>
-                  </a:lnTo>
-                  <a:lnTo>
-                    <a:pt x="5085199" y="3453843"/>
-                  </a:lnTo>
-                  <a:lnTo>
-                    <a:pt x="5013576" y="3450071"/>
-                  </a:lnTo>
-                  <a:lnTo>
-                    <a:pt x="4941954" y="3445822"/>
-                  </a:lnTo>
-                  <a:lnTo>
-                    <a:pt x="4870331" y="3441037"/>
-                  </a:lnTo>
-                  <a:lnTo>
-                    <a:pt x="4798709" y="3435648"/>
-                  </a:lnTo>
-                  <a:lnTo>
-                    <a:pt x="4727086" y="3429579"/>
-                  </a:lnTo>
-                  <a:lnTo>
-                    <a:pt x="4655464" y="3422745"/>
-                  </a:lnTo>
-                  <a:lnTo>
-                    <a:pt x="4583841" y="3415048"/>
-                  </a:lnTo>
-                  <a:lnTo>
-                    <a:pt x="4512219" y="3406381"/>
-                  </a:lnTo>
-                  <a:lnTo>
-                    <a:pt x="4440596" y="3396619"/>
-                  </a:lnTo>
-                  <a:lnTo>
-                    <a:pt x="4368974" y="3385626"/>
-                  </a:lnTo>
-                  <a:lnTo>
-                    <a:pt x="4297351" y="3373246"/>
-                  </a:lnTo>
-                  <a:lnTo>
-                    <a:pt x="4225729" y="3359304"/>
-                  </a:lnTo>
-                  <a:lnTo>
-                    <a:pt x="4154106" y="3343603"/>
-                  </a:lnTo>
-                  <a:lnTo>
-                    <a:pt x="4082483" y="3325921"/>
-                  </a:lnTo>
-                  <a:lnTo>
-                    <a:pt x="4010861" y="3306009"/>
-                  </a:lnTo>
-                  <a:lnTo>
-                    <a:pt x="3939238" y="3283583"/>
-                  </a:lnTo>
-                  <a:lnTo>
-                    <a:pt x="3867616" y="3258328"/>
-                  </a:lnTo>
-                  <a:lnTo>
-                    <a:pt x="3795993" y="3229887"/>
-                  </a:lnTo>
-                  <a:lnTo>
-                    <a:pt x="3724371" y="3197857"/>
-                  </a:lnTo>
-                  <a:lnTo>
-                    <a:pt x="3652748" y="3161786"/>
-                  </a:lnTo>
-                  <a:lnTo>
-                    <a:pt x="3581126" y="3121164"/>
-                  </a:lnTo>
-                  <a:lnTo>
-                    <a:pt x="3509503" y="3075417"/>
-                  </a:lnTo>
-                  <a:lnTo>
-                    <a:pt x="3437881" y="3023897"/>
-                  </a:lnTo>
-                  <a:lnTo>
-                    <a:pt x="3366258" y="2965877"/>
-                  </a:lnTo>
-                  <a:lnTo>
-                    <a:pt x="3294636" y="2900537"/>
-                  </a:lnTo>
-                  <a:lnTo>
-                    <a:pt x="3223013" y="2826953"/>
-                  </a:lnTo>
-                  <a:lnTo>
-                    <a:pt x="3151391" y="2744085"/>
-                  </a:lnTo>
-                  <a:lnTo>
-                    <a:pt x="3079768" y="2654245"/>
-                  </a:lnTo>
-                  <a:lnTo>
-                    <a:pt x="3008146" y="2653177"/>
-                  </a:lnTo>
-                  <a:lnTo>
-                    <a:pt x="2936523" y="2652108"/>
-                  </a:lnTo>
-                  <a:lnTo>
-                    <a:pt x="2864901" y="2651038"/>
-                  </a:lnTo>
-                  <a:lnTo>
-                    <a:pt x="2793278" y="2649966"/>
-                  </a:lnTo>
-                  <a:lnTo>
-                    <a:pt x="2721655" y="2648893"/>
-                  </a:lnTo>
-                  <a:lnTo>
-                    <a:pt x="2650033" y="2647818"/>
-                  </a:lnTo>
-                  <a:lnTo>
-                    <a:pt x="2578410" y="2646743"/>
-                  </a:lnTo>
-                  <a:lnTo>
-                    <a:pt x="2506788" y="2645665"/>
-                  </a:lnTo>
-                  <a:lnTo>
-                    <a:pt x="2435165" y="2644587"/>
-                  </a:lnTo>
-                  <a:lnTo>
-                    <a:pt x="2363543" y="2643507"/>
-                  </a:lnTo>
-                  <a:lnTo>
-                    <a:pt x="2291920" y="2642425"/>
-                  </a:lnTo>
-                  <a:lnTo>
-                    <a:pt x="2220298" y="2641342"/>
-                  </a:lnTo>
-                  <a:lnTo>
-                    <a:pt x="2148675" y="2640258"/>
-                  </a:lnTo>
-                  <a:lnTo>
-                    <a:pt x="2077053" y="2639172"/>
-                  </a:lnTo>
-                  <a:lnTo>
-                    <a:pt x="2005430" y="2638085"/>
-                  </a:lnTo>
-                  <a:lnTo>
-                    <a:pt x="1933808" y="2636997"/>
-                  </a:lnTo>
-                  <a:lnTo>
-                    <a:pt x="1862185" y="2635907"/>
-                  </a:lnTo>
-                  <a:lnTo>
-                    <a:pt x="1790563" y="2634816"/>
-                  </a:lnTo>
-                  <a:lnTo>
-                    <a:pt x="1718940" y="2633723"/>
-                  </a:lnTo>
-                  <a:lnTo>
-                    <a:pt x="1647318" y="2632629"/>
-                  </a:lnTo>
-                  <a:lnTo>
-                    <a:pt x="1575695" y="2631534"/>
-                  </a:lnTo>
-                  <a:lnTo>
-                    <a:pt x="1504073" y="2630437"/>
-                  </a:lnTo>
-                  <a:lnTo>
-                    <a:pt x="1432450" y="2629339"/>
-                  </a:lnTo>
-                  <a:lnTo>
-                    <a:pt x="1360827" y="2628239"/>
-                  </a:lnTo>
-                  <a:lnTo>
-                    <a:pt x="1289205" y="2627138"/>
-                  </a:lnTo>
-                  <a:lnTo>
-                    <a:pt x="1217582" y="2626035"/>
-                  </a:lnTo>
-                  <a:lnTo>
-                    <a:pt x="1145960" y="2624932"/>
-                  </a:lnTo>
-                  <a:lnTo>
-                    <a:pt x="1074337" y="2623826"/>
-                  </a:lnTo>
-                  <a:lnTo>
-                    <a:pt x="1002715" y="2622719"/>
-                  </a:lnTo>
-                  <a:lnTo>
-                    <a:pt x="931092" y="2621611"/>
-                  </a:lnTo>
-                  <a:lnTo>
-                    <a:pt x="859470" y="2620502"/>
-                  </a:lnTo>
-                  <a:lnTo>
-                    <a:pt x="787847" y="2619391"/>
-                  </a:lnTo>
-                  <a:lnTo>
-                    <a:pt x="716225" y="2618278"/>
-                  </a:lnTo>
-                  <a:lnTo>
-                    <a:pt x="644602" y="2617164"/>
-                  </a:lnTo>
-                  <a:lnTo>
-                    <a:pt x="572980" y="2616049"/>
-                  </a:lnTo>
-                  <a:lnTo>
-                    <a:pt x="501357" y="2614932"/>
-                  </a:lnTo>
-                  <a:lnTo>
-                    <a:pt x="429735" y="2613814"/>
-                  </a:lnTo>
-                  <a:lnTo>
-                    <a:pt x="358112" y="2612694"/>
-                  </a:lnTo>
-                  <a:lnTo>
-                    <a:pt x="286490" y="2611573"/>
-                  </a:lnTo>
-                  <a:lnTo>
-                    <a:pt x="214867" y="2610451"/>
-                  </a:lnTo>
-                  <a:lnTo>
-                    <a:pt x="143245" y="2609327"/>
-                  </a:lnTo>
-                  <a:lnTo>
-                    <a:pt x="71622" y="2608201"/>
-                  </a:lnTo>
-                  <a:lnTo>
-                    <a:pt x="0" y="2607074"/>
+                    <a:pt x="2291920" y="277670"/>
+                  </a:lnTo>
+                  <a:lnTo>
+                    <a:pt x="2363543" y="636947"/>
+                  </a:lnTo>
+                  <a:lnTo>
+                    <a:pt x="2435165" y="955963"/>
+                  </a:lnTo>
+                  <a:lnTo>
+                    <a:pt x="2506788" y="1239229"/>
+                  </a:lnTo>
+                  <a:lnTo>
+                    <a:pt x="2578410" y="1490753"/>
+                  </a:lnTo>
+                  <a:lnTo>
+                    <a:pt x="2650033" y="1714090"/>
+                  </a:lnTo>
+                  <a:lnTo>
+                    <a:pt x="2721655" y="1912400"/>
+                  </a:lnTo>
+                  <a:lnTo>
+                    <a:pt x="2793278" y="2088487"/>
+                  </a:lnTo>
+                  <a:lnTo>
+                    <a:pt x="2864901" y="2244841"/>
+                  </a:lnTo>
+                  <a:lnTo>
+                    <a:pt x="2936523" y="2383675"/>
+                  </a:lnTo>
+                  <a:lnTo>
+                    <a:pt x="3008146" y="2506950"/>
+                  </a:lnTo>
+                  <a:lnTo>
+                    <a:pt x="3079768" y="2616411"/>
+                  </a:lnTo>
+                  <a:lnTo>
+                    <a:pt x="3151391" y="2654949"/>
+                  </a:lnTo>
+                  <a:lnTo>
+                    <a:pt x="3223013" y="2656014"/>
+                  </a:lnTo>
+                  <a:lnTo>
+                    <a:pt x="3294636" y="2657079"/>
+                  </a:lnTo>
+                  <a:lnTo>
+                    <a:pt x="3366258" y="2658142"/>
+                  </a:lnTo>
+                  <a:lnTo>
+                    <a:pt x="3437881" y="2659203"/>
+                  </a:lnTo>
+                  <a:lnTo>
+                    <a:pt x="3509503" y="2660263"/>
+                  </a:lnTo>
+                  <a:lnTo>
+                    <a:pt x="3581126" y="2661322"/>
+                  </a:lnTo>
+                  <a:lnTo>
+                    <a:pt x="3652748" y="2662379"/>
+                  </a:lnTo>
+                  <a:lnTo>
+                    <a:pt x="3724371" y="2663435"/>
+                  </a:lnTo>
+                  <a:lnTo>
+                    <a:pt x="3795993" y="2664490"/>
+                  </a:lnTo>
+                  <a:lnTo>
+                    <a:pt x="3867616" y="2665543"/>
+                  </a:lnTo>
+                  <a:lnTo>
+                    <a:pt x="3939238" y="2666595"/>
+                  </a:lnTo>
+                  <a:lnTo>
+                    <a:pt x="4010861" y="2667646"/>
+                  </a:lnTo>
+                  <a:lnTo>
+                    <a:pt x="4082483" y="2668695"/>
+                  </a:lnTo>
+                  <a:lnTo>
+                    <a:pt x="4154106" y="2669743"/>
+                  </a:lnTo>
+                  <a:lnTo>
+                    <a:pt x="4225729" y="2670790"/>
+                  </a:lnTo>
+                  <a:lnTo>
+                    <a:pt x="4297351" y="2671835"/>
+                  </a:lnTo>
+                  <a:lnTo>
+                    <a:pt x="4368974" y="2672879"/>
+                  </a:lnTo>
+                  <a:lnTo>
+                    <a:pt x="4440596" y="2673921"/>
+                  </a:lnTo>
+                  <a:lnTo>
+                    <a:pt x="4512219" y="2674963"/>
+                  </a:lnTo>
+                  <a:lnTo>
+                    <a:pt x="4583841" y="2676003"/>
+                  </a:lnTo>
+                  <a:lnTo>
+                    <a:pt x="4655464" y="2677041"/>
+                  </a:lnTo>
+                  <a:lnTo>
+                    <a:pt x="4727086" y="2678078"/>
+                  </a:lnTo>
+                  <a:lnTo>
+                    <a:pt x="4798709" y="2679114"/>
+                  </a:lnTo>
+                  <a:lnTo>
+                    <a:pt x="4870331" y="2680149"/>
+                  </a:lnTo>
+                  <a:lnTo>
+                    <a:pt x="4941954" y="2681182"/>
+                  </a:lnTo>
+                  <a:lnTo>
+                    <a:pt x="5013576" y="2682214"/>
+                  </a:lnTo>
+                  <a:lnTo>
+                    <a:pt x="5085199" y="2683244"/>
+                  </a:lnTo>
+                  <a:lnTo>
+                    <a:pt x="5156821" y="2684273"/>
+                  </a:lnTo>
+                  <a:lnTo>
+                    <a:pt x="5228444" y="2685301"/>
+                  </a:lnTo>
+                  <a:lnTo>
+                    <a:pt x="5300066" y="2686328"/>
+                  </a:lnTo>
+                  <a:lnTo>
+                    <a:pt x="5371689" y="2687353"/>
+                  </a:lnTo>
+                  <a:lnTo>
+                    <a:pt x="5443311" y="2688377"/>
+                  </a:lnTo>
+                  <a:lnTo>
+                    <a:pt x="5514934" y="2689400"/>
+                  </a:lnTo>
+                  <a:lnTo>
+                    <a:pt x="5586557" y="2690421"/>
+                  </a:lnTo>
+                  <a:lnTo>
+                    <a:pt x="5658179" y="2691441"/>
+                  </a:lnTo>
+                  <a:lnTo>
+                    <a:pt x="5729802" y="2692460"/>
+                  </a:lnTo>
+                  <a:lnTo>
+                    <a:pt x="5801424" y="2693477"/>
+                  </a:lnTo>
+                  <a:lnTo>
+                    <a:pt x="5873047" y="2694493"/>
+                  </a:lnTo>
+                  <a:lnTo>
+                    <a:pt x="5944669" y="2695508"/>
+                  </a:lnTo>
+                  <a:lnTo>
+                    <a:pt x="6016292" y="2696521"/>
+                  </a:lnTo>
+                  <a:lnTo>
+                    <a:pt x="6087914" y="2697534"/>
+                  </a:lnTo>
+                  <a:lnTo>
+                    <a:pt x="6159537" y="2698544"/>
+                  </a:lnTo>
+                  <a:lnTo>
+                    <a:pt x="6231159" y="2699554"/>
+                  </a:lnTo>
+                  <a:lnTo>
+                    <a:pt x="6302782" y="2700562"/>
+                  </a:lnTo>
+                  <a:lnTo>
+                    <a:pt x="6374404" y="2701569"/>
+                  </a:lnTo>
+                  <a:lnTo>
+                    <a:pt x="6446027" y="2702575"/>
+                  </a:lnTo>
+                  <a:lnTo>
+                    <a:pt x="6517649" y="2703579"/>
+                  </a:lnTo>
+                  <a:lnTo>
+                    <a:pt x="6589272" y="2704582"/>
+                  </a:lnTo>
+                  <a:lnTo>
+                    <a:pt x="6660894" y="2705584"/>
+                  </a:lnTo>
+                  <a:lnTo>
+                    <a:pt x="6732517" y="2706584"/>
+                  </a:lnTo>
+                  <a:lnTo>
+                    <a:pt x="6804139" y="2707584"/>
+                  </a:lnTo>
+                  <a:lnTo>
+                    <a:pt x="6875762" y="2708582"/>
+                  </a:lnTo>
+                  <a:lnTo>
+                    <a:pt x="6947385" y="2709578"/>
+                  </a:lnTo>
+                  <a:lnTo>
+                    <a:pt x="7019007" y="2710574"/>
+                  </a:lnTo>
+                  <a:lnTo>
+                    <a:pt x="7090630" y="2711568"/>
+                  </a:lnTo>
+                  <a:lnTo>
+                    <a:pt x="7090630" y="3482630"/>
+                  </a:lnTo>
+                  <a:lnTo>
+                    <a:pt x="7019007" y="3482490"/>
+                  </a:lnTo>
+                  <a:lnTo>
+                    <a:pt x="6947385" y="3482331"/>
+                  </a:lnTo>
+                  <a:lnTo>
+                    <a:pt x="6875762" y="3482152"/>
+                  </a:lnTo>
+                  <a:lnTo>
+                    <a:pt x="6804139" y="3481951"/>
+                  </a:lnTo>
+                  <a:lnTo>
+                    <a:pt x="6732517" y="3481725"/>
+                  </a:lnTo>
+                  <a:lnTo>
+                    <a:pt x="6660894" y="3481470"/>
+                  </a:lnTo>
+                  <a:lnTo>
+                    <a:pt x="6589272" y="3481182"/>
+                  </a:lnTo>
+                  <a:lnTo>
+                    <a:pt x="6517649" y="3480859"/>
+                  </a:lnTo>
+                  <a:lnTo>
+                    <a:pt x="6446027" y="3480494"/>
+                  </a:lnTo>
+                  <a:lnTo>
+                    <a:pt x="6374404" y="3480084"/>
+                  </a:lnTo>
+                  <a:lnTo>
+                    <a:pt x="6302782" y="3479621"/>
+                  </a:lnTo>
+                  <a:lnTo>
+                    <a:pt x="6231159" y="3479101"/>
+                  </a:lnTo>
+                  <a:lnTo>
+                    <a:pt x="6159537" y="3478515"/>
+                  </a:lnTo>
+                  <a:lnTo>
+                    <a:pt x="6087914" y="3477854"/>
+                  </a:lnTo>
+                  <a:lnTo>
+                    <a:pt x="6016292" y="3477111"/>
+                  </a:lnTo>
+                  <a:lnTo>
+                    <a:pt x="5944669" y="3476273"/>
+                  </a:lnTo>
+                  <a:lnTo>
+                    <a:pt x="5873047" y="3475330"/>
+                  </a:lnTo>
+                  <a:lnTo>
+                    <a:pt x="5801424" y="3474268"/>
+                  </a:lnTo>
+                  <a:lnTo>
+                    <a:pt x="5729802" y="3473072"/>
+                  </a:lnTo>
+                  <a:lnTo>
+                    <a:pt x="5658179" y="3471724"/>
+                  </a:lnTo>
+                  <a:lnTo>
+                    <a:pt x="5586557" y="3470207"/>
+                  </a:lnTo>
+                  <a:lnTo>
+                    <a:pt x="5514934" y="3468499"/>
+                  </a:lnTo>
+                  <a:lnTo>
+                    <a:pt x="5443311" y="3466574"/>
+                  </a:lnTo>
+                  <a:lnTo>
+                    <a:pt x="5371689" y="3464407"/>
+                  </a:lnTo>
+                  <a:lnTo>
+                    <a:pt x="5300066" y="3461966"/>
+                  </a:lnTo>
+                  <a:lnTo>
+                    <a:pt x="5228444" y="3459218"/>
+                  </a:lnTo>
+                  <a:lnTo>
+                    <a:pt x="5156821" y="3456122"/>
+                  </a:lnTo>
+                  <a:lnTo>
+                    <a:pt x="5085199" y="3452636"/>
+                  </a:lnTo>
+                  <a:lnTo>
+                    <a:pt x="5013576" y="3448709"/>
+                  </a:lnTo>
+                  <a:lnTo>
+                    <a:pt x="4941954" y="3444287"/>
+                  </a:lnTo>
+                  <a:lnTo>
+                    <a:pt x="4870331" y="3439308"/>
+                  </a:lnTo>
+                  <a:lnTo>
+                    <a:pt x="4798709" y="3433699"/>
+                  </a:lnTo>
+                  <a:lnTo>
+                    <a:pt x="4727086" y="3427383"/>
+                  </a:lnTo>
+                  <a:lnTo>
+                    <a:pt x="4655464" y="3420270"/>
+                  </a:lnTo>
+                  <a:lnTo>
+                    <a:pt x="4583841" y="3412259"/>
+                  </a:lnTo>
+                  <a:lnTo>
+                    <a:pt x="4512219" y="3403237"/>
+                  </a:lnTo>
+                  <a:lnTo>
+                    <a:pt x="4440596" y="3393076"/>
+                  </a:lnTo>
+                  <a:lnTo>
+                    <a:pt x="4368974" y="3381633"/>
+                  </a:lnTo>
+                  <a:lnTo>
+                    <a:pt x="4297351" y="3368746"/>
+                  </a:lnTo>
+                  <a:lnTo>
+                    <a:pt x="4225729" y="3354233"/>
+                  </a:lnTo>
+                  <a:lnTo>
+                    <a:pt x="4154106" y="3337888"/>
+                  </a:lnTo>
+                  <a:lnTo>
+                    <a:pt x="4082483" y="3319480"/>
+                  </a:lnTo>
+                  <a:lnTo>
+                    <a:pt x="4010861" y="3298749"/>
+                  </a:lnTo>
+                  <a:lnTo>
+                    <a:pt x="3939238" y="3275401"/>
+                  </a:lnTo>
+                  <a:lnTo>
+                    <a:pt x="3867616" y="3249107"/>
+                  </a:lnTo>
+                  <a:lnTo>
+                    <a:pt x="3795993" y="3219495"/>
+                  </a:lnTo>
+                  <a:lnTo>
+                    <a:pt x="3724371" y="3186146"/>
+                  </a:lnTo>
+                  <a:lnTo>
+                    <a:pt x="3652748" y="3148587"/>
+                  </a:lnTo>
+                  <a:lnTo>
+                    <a:pt x="3581126" y="3106289"/>
+                  </a:lnTo>
+                  <a:lnTo>
+                    <a:pt x="3509503" y="3058652"/>
+                  </a:lnTo>
+                  <a:lnTo>
+                    <a:pt x="3437881" y="3005004"/>
+                  </a:lnTo>
+                  <a:lnTo>
+                    <a:pt x="3366258" y="2944585"/>
+                  </a:lnTo>
+                  <a:lnTo>
+                    <a:pt x="3294636" y="2876540"/>
+                  </a:lnTo>
+                  <a:lnTo>
+                    <a:pt x="3223013" y="2799909"/>
+                  </a:lnTo>
+                  <a:lnTo>
+                    <a:pt x="3151391" y="2713606"/>
+                  </a:lnTo>
+                  <a:lnTo>
+                    <a:pt x="3079768" y="2653882"/>
+                  </a:lnTo>
+                  <a:lnTo>
+                    <a:pt x="3008146" y="2652814"/>
+                  </a:lnTo>
+                  <a:lnTo>
+                    <a:pt x="2936523" y="2651744"/>
+                  </a:lnTo>
+                  <a:lnTo>
+                    <a:pt x="2864901" y="2650673"/>
+                  </a:lnTo>
+                  <a:lnTo>
+                    <a:pt x="2793278" y="2649600"/>
+                  </a:lnTo>
+                  <a:lnTo>
+                    <a:pt x="2721655" y="2648526"/>
+                  </a:lnTo>
+                  <a:lnTo>
+                    <a:pt x="2650033" y="2647451"/>
+                  </a:lnTo>
+                  <a:lnTo>
+                    <a:pt x="2578410" y="2646375"/>
+                  </a:lnTo>
+                  <a:lnTo>
+                    <a:pt x="2506788" y="2645297"/>
+                  </a:lnTo>
+                  <a:lnTo>
+                    <a:pt x="2435165" y="2644217"/>
+                  </a:lnTo>
+                  <a:lnTo>
+                    <a:pt x="2363543" y="2643136"/>
+                  </a:lnTo>
+                  <a:lnTo>
+                    <a:pt x="2291920" y="2642054"/>
+                  </a:lnTo>
+                  <a:lnTo>
+                    <a:pt x="2220298" y="2640971"/>
+                  </a:lnTo>
+                  <a:lnTo>
+                    <a:pt x="2148675" y="2639886"/>
+                  </a:lnTo>
+                  <a:lnTo>
+                    <a:pt x="2077053" y="2638799"/>
+                  </a:lnTo>
+                  <a:lnTo>
+                    <a:pt x="2005430" y="2637712"/>
+                  </a:lnTo>
+                  <a:lnTo>
+                    <a:pt x="1933808" y="2636622"/>
+                  </a:lnTo>
+                  <a:lnTo>
+                    <a:pt x="1862185" y="2635532"/>
+                  </a:lnTo>
+                  <a:lnTo>
+                    <a:pt x="1790563" y="2634440"/>
+                  </a:lnTo>
+                  <a:lnTo>
+                    <a:pt x="1718940" y="2633346"/>
+                  </a:lnTo>
+                  <a:lnTo>
+                    <a:pt x="1647318" y="2632252"/>
+                  </a:lnTo>
+                  <a:lnTo>
+                    <a:pt x="1575695" y="2631155"/>
+                  </a:lnTo>
+                  <a:lnTo>
+                    <a:pt x="1504073" y="2630058"/>
+                  </a:lnTo>
+                  <a:lnTo>
+                    <a:pt x="1432450" y="2628959"/>
+                  </a:lnTo>
+                  <a:lnTo>
+                    <a:pt x="1360827" y="2627858"/>
+                  </a:lnTo>
+                  <a:lnTo>
+                    <a:pt x="1289205" y="2626757"/>
+                  </a:lnTo>
+                  <a:lnTo>
+                    <a:pt x="1217582" y="2625653"/>
+                  </a:lnTo>
+                  <a:lnTo>
+                    <a:pt x="1145960" y="2624549"/>
+                  </a:lnTo>
+                  <a:lnTo>
+                    <a:pt x="1074337" y="2623443"/>
+                  </a:lnTo>
+                  <a:lnTo>
+                    <a:pt x="1002715" y="2622335"/>
+                  </a:lnTo>
+                  <a:lnTo>
+                    <a:pt x="931092" y="2621226"/>
+                  </a:lnTo>
+                  <a:lnTo>
+                    <a:pt x="859470" y="2620116"/>
+                  </a:lnTo>
+                  <a:lnTo>
+                    <a:pt x="787847" y="2619004"/>
+                  </a:lnTo>
+                  <a:lnTo>
+                    <a:pt x="716225" y="2617891"/>
+                  </a:lnTo>
+                  <a:lnTo>
+                    <a:pt x="644602" y="2616776"/>
+                  </a:lnTo>
+                  <a:lnTo>
+                    <a:pt x="572980" y="2615660"/>
+                  </a:lnTo>
+                  <a:lnTo>
+                    <a:pt x="501357" y="2614542"/>
+                  </a:lnTo>
+                  <a:lnTo>
+                    <a:pt x="429735" y="2613423"/>
+                  </a:lnTo>
+                  <a:lnTo>
+                    <a:pt x="358112" y="2612303"/>
+                  </a:lnTo>
+                  <a:lnTo>
+                    <a:pt x="286490" y="2611181"/>
+                  </a:lnTo>
+                  <a:lnTo>
+                    <a:pt x="214867" y="2610058"/>
+                  </a:lnTo>
+                  <a:lnTo>
+                    <a:pt x="143245" y="2608933"/>
+                  </a:lnTo>
+                  <a:lnTo>
+                    <a:pt x="71622" y="2607807"/>
+                  </a:lnTo>
+                  <a:lnTo>
+                    <a:pt x="0" y="2606679"/>
                   </a:lnTo>
                   <a:lnTo>
                     <a:pt x="0" y="0"/>
@@ -3933,222 +3930,219 @@
           </p:nvSpPr>
           <p:spPr>
             <a:xfrm>
-              <a:off x="3389522" y="2073503"/>
-              <a:ext cx="4873156" cy="2711892"/>
+              <a:off x="3414819" y="2073503"/>
+              <a:ext cx="4847860" cy="2711568"/>
             </a:xfrm>
             <a:custGeom>
               <a:avLst/>
               <a:pathLst>
-                <a:path w="4873156" h="2711892">
+                <a:path w="4847860" h="2711568">
                   <a:moveTo>
                     <a:pt x="0" y="0"/>
                   </a:moveTo>
                   <a:lnTo>
-                    <a:pt x="2824" y="17250"/>
-                  </a:lnTo>
-                  <a:lnTo>
-                    <a:pt x="74447" y="405621"/>
-                  </a:lnTo>
-                  <a:lnTo>
-                    <a:pt x="146069" y="750480"/>
-                  </a:lnTo>
-                  <a:lnTo>
-                    <a:pt x="217692" y="1056703"/>
-                  </a:lnTo>
-                  <a:lnTo>
-                    <a:pt x="289314" y="1328618"/>
-                  </a:lnTo>
-                  <a:lnTo>
-                    <a:pt x="360937" y="1570069"/>
-                  </a:lnTo>
-                  <a:lnTo>
-                    <a:pt x="432559" y="1784469"/>
-                  </a:lnTo>
-                  <a:lnTo>
-                    <a:pt x="504182" y="1974849"/>
-                  </a:lnTo>
-                  <a:lnTo>
-                    <a:pt x="575805" y="2143899"/>
-                  </a:lnTo>
-                  <a:lnTo>
-                    <a:pt x="647427" y="2294010"/>
-                  </a:lnTo>
-                  <a:lnTo>
-                    <a:pt x="719050" y="2427302"/>
-                  </a:lnTo>
-                  <a:lnTo>
-                    <a:pt x="790672" y="2545662"/>
-                  </a:lnTo>
-                  <a:lnTo>
-                    <a:pt x="862295" y="2650761"/>
-                  </a:lnTo>
-                  <a:lnTo>
-                    <a:pt x="933917" y="2655311"/>
-                  </a:lnTo>
-                  <a:lnTo>
-                    <a:pt x="1005540" y="2656376"/>
-                  </a:lnTo>
-                  <a:lnTo>
-                    <a:pt x="1077162" y="2657439"/>
-                  </a:lnTo>
-                  <a:lnTo>
-                    <a:pt x="1148785" y="2658502"/>
-                  </a:lnTo>
-                  <a:lnTo>
-                    <a:pt x="1220407" y="2659562"/>
-                  </a:lnTo>
-                  <a:lnTo>
-                    <a:pt x="1292030" y="2660622"/>
-                  </a:lnTo>
-                  <a:lnTo>
-                    <a:pt x="1363652" y="2661680"/>
-                  </a:lnTo>
-                  <a:lnTo>
-                    <a:pt x="1435275" y="2662737"/>
-                  </a:lnTo>
-                  <a:lnTo>
-                    <a:pt x="1506897" y="2663792"/>
-                  </a:lnTo>
-                  <a:lnTo>
-                    <a:pt x="1578520" y="2664846"/>
-                  </a:lnTo>
-                  <a:lnTo>
-                    <a:pt x="1650142" y="2665898"/>
-                  </a:lnTo>
-                  <a:lnTo>
-                    <a:pt x="1721765" y="2666950"/>
-                  </a:lnTo>
-                  <a:lnTo>
-                    <a:pt x="1793387" y="2668000"/>
-                  </a:lnTo>
-                  <a:lnTo>
-                    <a:pt x="1865010" y="2669048"/>
-                  </a:lnTo>
-                  <a:lnTo>
-                    <a:pt x="1936633" y="2670095"/>
-                  </a:lnTo>
-                  <a:lnTo>
-                    <a:pt x="2008255" y="2671141"/>
-                  </a:lnTo>
-                  <a:lnTo>
-                    <a:pt x="2079878" y="2672186"/>
-                  </a:lnTo>
-                  <a:lnTo>
-                    <a:pt x="2151500" y="2673229"/>
-                  </a:lnTo>
-                  <a:lnTo>
-                    <a:pt x="2223123" y="2674271"/>
-                  </a:lnTo>
-                  <a:lnTo>
-                    <a:pt x="2294745" y="2675311"/>
-                  </a:lnTo>
-                  <a:lnTo>
-                    <a:pt x="2366368" y="2676351"/>
-                  </a:lnTo>
-                  <a:lnTo>
-                    <a:pt x="2437990" y="2677388"/>
-                  </a:lnTo>
-                  <a:lnTo>
-                    <a:pt x="2509613" y="2678425"/>
-                  </a:lnTo>
-                  <a:lnTo>
-                    <a:pt x="2581235" y="2679460"/>
-                  </a:lnTo>
-                  <a:lnTo>
-                    <a:pt x="2652858" y="2680494"/>
-                  </a:lnTo>
-                  <a:lnTo>
-                    <a:pt x="2724480" y="2681526"/>
-                  </a:lnTo>
-                  <a:lnTo>
-                    <a:pt x="2796103" y="2682558"/>
-                  </a:lnTo>
-                  <a:lnTo>
-                    <a:pt x="2867725" y="2683587"/>
-                  </a:lnTo>
-                  <a:lnTo>
-                    <a:pt x="2939348" y="2684616"/>
-                  </a:lnTo>
-                  <a:lnTo>
-                    <a:pt x="3010970" y="2685643"/>
-                  </a:lnTo>
-                  <a:lnTo>
-                    <a:pt x="3082593" y="2686669"/>
-                  </a:lnTo>
-                  <a:lnTo>
-                    <a:pt x="3154215" y="2687694"/>
-                  </a:lnTo>
-                  <a:lnTo>
-                    <a:pt x="3225838" y="2688717"/>
-                  </a:lnTo>
-                  <a:lnTo>
-                    <a:pt x="3297461" y="2689739"/>
-                  </a:lnTo>
-                  <a:lnTo>
-                    <a:pt x="3369083" y="2690759"/>
-                  </a:lnTo>
-                  <a:lnTo>
-                    <a:pt x="3440706" y="2691779"/>
-                  </a:lnTo>
-                  <a:lnTo>
-                    <a:pt x="3512328" y="2692797"/>
-                  </a:lnTo>
-                  <a:lnTo>
-                    <a:pt x="3583951" y="2693813"/>
-                  </a:lnTo>
-                  <a:lnTo>
-                    <a:pt x="3655573" y="2694829"/>
-                  </a:lnTo>
-                  <a:lnTo>
-                    <a:pt x="3727196" y="2695843"/>
-                  </a:lnTo>
-                  <a:lnTo>
-                    <a:pt x="3798818" y="2696856"/>
-                  </a:lnTo>
-                  <a:lnTo>
-                    <a:pt x="3870441" y="2697867"/>
-                  </a:lnTo>
-                  <a:lnTo>
-                    <a:pt x="3942063" y="2698877"/>
-                  </a:lnTo>
-                  <a:lnTo>
-                    <a:pt x="4013686" y="2699886"/>
-                  </a:lnTo>
-                  <a:lnTo>
-                    <a:pt x="4085308" y="2700894"/>
-                  </a:lnTo>
-                  <a:lnTo>
-                    <a:pt x="4156931" y="2701900"/>
-                  </a:lnTo>
-                  <a:lnTo>
-                    <a:pt x="4228553" y="2702905"/>
-                  </a:lnTo>
-                  <a:lnTo>
-                    <a:pt x="4300176" y="2703909"/>
-                  </a:lnTo>
-                  <a:lnTo>
-                    <a:pt x="4371798" y="2704911"/>
-                  </a:lnTo>
-                  <a:lnTo>
-                    <a:pt x="4443421" y="2705912"/>
-                  </a:lnTo>
-                  <a:lnTo>
-                    <a:pt x="4515043" y="2706912"/>
-                  </a:lnTo>
-                  <a:lnTo>
-                    <a:pt x="4586666" y="2707911"/>
-                  </a:lnTo>
-                  <a:lnTo>
-                    <a:pt x="4658289" y="2708908"/>
-                  </a:lnTo>
-                  <a:lnTo>
-                    <a:pt x="4729911" y="2709904"/>
-                  </a:lnTo>
-                  <a:lnTo>
-                    <a:pt x="4801534" y="2710899"/>
-                  </a:lnTo>
-                  <a:lnTo>
-                    <a:pt x="4873156" y="2711892"/>
+                    <a:pt x="49151" y="277670"/>
+                  </a:lnTo>
+                  <a:lnTo>
+                    <a:pt x="120773" y="636947"/>
+                  </a:lnTo>
+                  <a:lnTo>
+                    <a:pt x="192396" y="955963"/>
+                  </a:lnTo>
+                  <a:lnTo>
+                    <a:pt x="264018" y="1239229"/>
+                  </a:lnTo>
+                  <a:lnTo>
+                    <a:pt x="335641" y="1490753"/>
+                  </a:lnTo>
+                  <a:lnTo>
+                    <a:pt x="407263" y="1714090"/>
+                  </a:lnTo>
+                  <a:lnTo>
+                    <a:pt x="478886" y="1912400"/>
+                  </a:lnTo>
+                  <a:lnTo>
+                    <a:pt x="550508" y="2088487"/>
+                  </a:lnTo>
+                  <a:lnTo>
+                    <a:pt x="622131" y="2244841"/>
+                  </a:lnTo>
+                  <a:lnTo>
+                    <a:pt x="693753" y="2383675"/>
+                  </a:lnTo>
+                  <a:lnTo>
+                    <a:pt x="765376" y="2506950"/>
+                  </a:lnTo>
+                  <a:lnTo>
+                    <a:pt x="836998" y="2616411"/>
+                  </a:lnTo>
+                  <a:lnTo>
+                    <a:pt x="908621" y="2654949"/>
+                  </a:lnTo>
+                  <a:lnTo>
+                    <a:pt x="980243" y="2656014"/>
+                  </a:lnTo>
+                  <a:lnTo>
+                    <a:pt x="1051866" y="2657079"/>
+                  </a:lnTo>
+                  <a:lnTo>
+                    <a:pt x="1123488" y="2658142"/>
+                  </a:lnTo>
+                  <a:lnTo>
+                    <a:pt x="1195111" y="2659203"/>
+                  </a:lnTo>
+                  <a:lnTo>
+                    <a:pt x="1266733" y="2660263"/>
+                  </a:lnTo>
+                  <a:lnTo>
+                    <a:pt x="1338356" y="2661322"/>
+                  </a:lnTo>
+                  <a:lnTo>
+                    <a:pt x="1409979" y="2662379"/>
+                  </a:lnTo>
+                  <a:lnTo>
+                    <a:pt x="1481601" y="2663435"/>
+                  </a:lnTo>
+                  <a:lnTo>
+                    <a:pt x="1553224" y="2664490"/>
+                  </a:lnTo>
+                  <a:lnTo>
+                    <a:pt x="1624846" y="2665543"/>
+                  </a:lnTo>
+                  <a:lnTo>
+                    <a:pt x="1696469" y="2666595"/>
+                  </a:lnTo>
+                  <a:lnTo>
+                    <a:pt x="1768091" y="2667646"/>
+                  </a:lnTo>
+                  <a:lnTo>
+                    <a:pt x="1839714" y="2668695"/>
+                  </a:lnTo>
+                  <a:lnTo>
+                    <a:pt x="1911336" y="2669743"/>
+                  </a:lnTo>
+                  <a:lnTo>
+                    <a:pt x="1982959" y="2670790"/>
+                  </a:lnTo>
+                  <a:lnTo>
+                    <a:pt x="2054581" y="2671835"/>
+                  </a:lnTo>
+                  <a:lnTo>
+                    <a:pt x="2126204" y="2672879"/>
+                  </a:lnTo>
+                  <a:lnTo>
+                    <a:pt x="2197826" y="2673921"/>
+                  </a:lnTo>
+                  <a:lnTo>
+                    <a:pt x="2269449" y="2674963"/>
+                  </a:lnTo>
+                  <a:lnTo>
+                    <a:pt x="2341071" y="2676003"/>
+                  </a:lnTo>
+                  <a:lnTo>
+                    <a:pt x="2412694" y="2677041"/>
+                  </a:lnTo>
+                  <a:lnTo>
+                    <a:pt x="2484316" y="2678078"/>
+                  </a:lnTo>
+                  <a:lnTo>
+                    <a:pt x="2555939" y="2679114"/>
+                  </a:lnTo>
+                  <a:lnTo>
+                    <a:pt x="2627561" y="2680149"/>
+                  </a:lnTo>
+                  <a:lnTo>
+                    <a:pt x="2699184" y="2681182"/>
+                  </a:lnTo>
+                  <a:lnTo>
+                    <a:pt x="2770807" y="2682214"/>
+                  </a:lnTo>
+                  <a:lnTo>
+                    <a:pt x="2842429" y="2683244"/>
+                  </a:lnTo>
+                  <a:lnTo>
+                    <a:pt x="2914052" y="2684273"/>
+                  </a:lnTo>
+                  <a:lnTo>
+                    <a:pt x="2985674" y="2685301"/>
+                  </a:lnTo>
+                  <a:lnTo>
+                    <a:pt x="3057297" y="2686328"/>
+                  </a:lnTo>
+                  <a:lnTo>
+                    <a:pt x="3128919" y="2687353"/>
+                  </a:lnTo>
+                  <a:lnTo>
+                    <a:pt x="3200542" y="2688377"/>
+                  </a:lnTo>
+                  <a:lnTo>
+                    <a:pt x="3272164" y="2689400"/>
+                  </a:lnTo>
+                  <a:lnTo>
+                    <a:pt x="3343787" y="2690421"/>
+                  </a:lnTo>
+                  <a:lnTo>
+                    <a:pt x="3415409" y="2691441"/>
+                  </a:lnTo>
+                  <a:lnTo>
+                    <a:pt x="3487032" y="2692460"/>
+                  </a:lnTo>
+                  <a:lnTo>
+                    <a:pt x="3558654" y="2693477"/>
+                  </a:lnTo>
+                  <a:lnTo>
+                    <a:pt x="3630277" y="2694493"/>
+                  </a:lnTo>
+                  <a:lnTo>
+                    <a:pt x="3701899" y="2695508"/>
+                  </a:lnTo>
+                  <a:lnTo>
+                    <a:pt x="3773522" y="2696521"/>
+                  </a:lnTo>
+                  <a:lnTo>
+                    <a:pt x="3845144" y="2697534"/>
+                  </a:lnTo>
+                  <a:lnTo>
+                    <a:pt x="3916767" y="2698544"/>
+                  </a:lnTo>
+                  <a:lnTo>
+                    <a:pt x="3988389" y="2699554"/>
+                  </a:lnTo>
+                  <a:lnTo>
+                    <a:pt x="4060012" y="2700562"/>
+                  </a:lnTo>
+                  <a:lnTo>
+                    <a:pt x="4131635" y="2701569"/>
+                  </a:lnTo>
+                  <a:lnTo>
+                    <a:pt x="4203257" y="2702575"/>
+                  </a:lnTo>
+                  <a:lnTo>
+                    <a:pt x="4274880" y="2703579"/>
+                  </a:lnTo>
+                  <a:lnTo>
+                    <a:pt x="4346502" y="2704582"/>
+                  </a:lnTo>
+                  <a:lnTo>
+                    <a:pt x="4418125" y="2705584"/>
+                  </a:lnTo>
+                  <a:lnTo>
+                    <a:pt x="4489747" y="2706584"/>
+                  </a:lnTo>
+                  <a:lnTo>
+                    <a:pt x="4561370" y="2707584"/>
+                  </a:lnTo>
+                  <a:lnTo>
+                    <a:pt x="4632992" y="2708582"/>
+                  </a:lnTo>
+                  <a:lnTo>
+                    <a:pt x="4704615" y="2709578"/>
+                  </a:lnTo>
+                  <a:lnTo>
+                    <a:pt x="4776237" y="2710574"/>
+                  </a:lnTo>
+                  <a:lnTo>
+                    <a:pt x="4847860" y="2711568"/>
                   </a:lnTo>
                 </a:path>
               </a:pathLst>
@@ -4168,309 +4162,309 @@
           </p:nvSpPr>
           <p:spPr>
             <a:xfrm>
-              <a:off x="1172049" y="4680577"/>
-              <a:ext cx="7090630" cy="875598"/>
+              <a:off x="1172049" y="4680182"/>
+              <a:ext cx="7090630" cy="875951"/>
             </a:xfrm>
             <a:custGeom>
               <a:avLst/>
               <a:pathLst>
-                <a:path w="7090630" h="875598">
+                <a:path w="7090630" h="875951">
                   <a:moveTo>
-                    <a:pt x="7090630" y="875598"/>
+                    <a:pt x="7090630" y="875951"/>
                   </a:moveTo>
                   <a:lnTo>
-                    <a:pt x="7019007" y="875463"/>
-                  </a:lnTo>
-                  <a:lnTo>
-                    <a:pt x="6947385" y="875310"/>
-                  </a:lnTo>
-                  <a:lnTo>
-                    <a:pt x="6875762" y="875138"/>
-                  </a:lnTo>
-                  <a:lnTo>
-                    <a:pt x="6804139" y="874945"/>
-                  </a:lnTo>
-                  <a:lnTo>
-                    <a:pt x="6732517" y="874727"/>
-                  </a:lnTo>
-                  <a:lnTo>
-                    <a:pt x="6660894" y="874482"/>
-                  </a:lnTo>
-                  <a:lnTo>
-                    <a:pt x="6589272" y="874206"/>
-                  </a:lnTo>
-                  <a:lnTo>
-                    <a:pt x="6517649" y="873894"/>
-                  </a:lnTo>
-                  <a:lnTo>
-                    <a:pt x="6446027" y="873544"/>
-                  </a:lnTo>
-                  <a:lnTo>
-                    <a:pt x="6374404" y="873149"/>
-                  </a:lnTo>
-                  <a:lnTo>
-                    <a:pt x="6302782" y="872705"/>
-                  </a:lnTo>
-                  <a:lnTo>
-                    <a:pt x="6231159" y="872204"/>
-                  </a:lnTo>
-                  <a:lnTo>
-                    <a:pt x="6159537" y="871641"/>
-                  </a:lnTo>
-                  <a:lnTo>
-                    <a:pt x="6087914" y="871006"/>
-                  </a:lnTo>
-                  <a:lnTo>
-                    <a:pt x="6016292" y="870291"/>
-                  </a:lnTo>
-                  <a:lnTo>
-                    <a:pt x="5944669" y="869486"/>
-                  </a:lnTo>
-                  <a:lnTo>
-                    <a:pt x="5873047" y="868580"/>
-                  </a:lnTo>
-                  <a:lnTo>
-                    <a:pt x="5801424" y="867559"/>
-                  </a:lnTo>
-                  <a:lnTo>
-                    <a:pt x="5729802" y="866409"/>
-                  </a:lnTo>
-                  <a:lnTo>
-                    <a:pt x="5658179" y="865114"/>
-                  </a:lnTo>
-                  <a:lnTo>
-                    <a:pt x="5586557" y="863656"/>
-                  </a:lnTo>
-                  <a:lnTo>
-                    <a:pt x="5514934" y="862013"/>
-                  </a:lnTo>
-                  <a:lnTo>
-                    <a:pt x="5443311" y="860164"/>
-                  </a:lnTo>
-                  <a:lnTo>
-                    <a:pt x="5371689" y="858081"/>
-                  </a:lnTo>
-                  <a:lnTo>
-                    <a:pt x="5300066" y="855735"/>
-                  </a:lnTo>
-                  <a:lnTo>
-                    <a:pt x="5228444" y="853094"/>
-                  </a:lnTo>
-                  <a:lnTo>
-                    <a:pt x="5156821" y="850119"/>
-                  </a:lnTo>
-                  <a:lnTo>
-                    <a:pt x="5085199" y="846769"/>
-                  </a:lnTo>
-                  <a:lnTo>
-                    <a:pt x="5013576" y="842996"/>
-                  </a:lnTo>
-                  <a:lnTo>
-                    <a:pt x="4941954" y="838747"/>
-                  </a:lnTo>
-                  <a:lnTo>
-                    <a:pt x="4870331" y="833962"/>
-                  </a:lnTo>
-                  <a:lnTo>
-                    <a:pt x="4798709" y="828573"/>
-                  </a:lnTo>
-                  <a:lnTo>
-                    <a:pt x="4727086" y="822505"/>
-                  </a:lnTo>
-                  <a:lnTo>
-                    <a:pt x="4655464" y="815670"/>
-                  </a:lnTo>
-                  <a:lnTo>
-                    <a:pt x="4583841" y="807974"/>
-                  </a:lnTo>
-                  <a:lnTo>
-                    <a:pt x="4512219" y="799306"/>
-                  </a:lnTo>
-                  <a:lnTo>
-                    <a:pt x="4440596" y="789545"/>
-                  </a:lnTo>
-                  <a:lnTo>
-                    <a:pt x="4368974" y="778552"/>
-                  </a:lnTo>
-                  <a:lnTo>
-                    <a:pt x="4297351" y="766172"/>
-                  </a:lnTo>
-                  <a:lnTo>
-                    <a:pt x="4225729" y="752230"/>
-                  </a:lnTo>
-                  <a:lnTo>
-                    <a:pt x="4154106" y="736529"/>
-                  </a:lnTo>
-                  <a:lnTo>
-                    <a:pt x="4082483" y="718847"/>
-                  </a:lnTo>
-                  <a:lnTo>
-                    <a:pt x="4010861" y="698934"/>
-                  </a:lnTo>
-                  <a:lnTo>
-                    <a:pt x="3939238" y="676508"/>
-                  </a:lnTo>
-                  <a:lnTo>
-                    <a:pt x="3867616" y="651254"/>
-                  </a:lnTo>
-                  <a:lnTo>
-                    <a:pt x="3795993" y="622812"/>
-                  </a:lnTo>
-                  <a:lnTo>
-                    <a:pt x="3724371" y="590782"/>
-                  </a:lnTo>
-                  <a:lnTo>
-                    <a:pt x="3652748" y="554711"/>
-                  </a:lnTo>
-                  <a:lnTo>
-                    <a:pt x="3581126" y="514089"/>
-                  </a:lnTo>
-                  <a:lnTo>
-                    <a:pt x="3509503" y="468342"/>
-                  </a:lnTo>
-                  <a:lnTo>
-                    <a:pt x="3437881" y="416822"/>
-                  </a:lnTo>
-                  <a:lnTo>
-                    <a:pt x="3366258" y="358803"/>
-                  </a:lnTo>
-                  <a:lnTo>
-                    <a:pt x="3294636" y="293463"/>
-                  </a:lnTo>
-                  <a:lnTo>
-                    <a:pt x="3223013" y="219878"/>
-                  </a:lnTo>
-                  <a:lnTo>
-                    <a:pt x="3151391" y="137010"/>
-                  </a:lnTo>
-                  <a:lnTo>
-                    <a:pt x="3079768" y="47170"/>
-                  </a:lnTo>
-                  <a:lnTo>
-                    <a:pt x="3008146" y="46102"/>
-                  </a:lnTo>
-                  <a:lnTo>
-                    <a:pt x="2936523" y="45033"/>
-                  </a:lnTo>
-                  <a:lnTo>
-                    <a:pt x="2864901" y="43963"/>
-                  </a:lnTo>
-                  <a:lnTo>
-                    <a:pt x="2793278" y="42891"/>
-                  </a:lnTo>
-                  <a:lnTo>
-                    <a:pt x="2721655" y="41818"/>
-                  </a:lnTo>
-                  <a:lnTo>
-                    <a:pt x="2650033" y="40744"/>
-                  </a:lnTo>
-                  <a:lnTo>
-                    <a:pt x="2578410" y="39668"/>
-                  </a:lnTo>
-                  <a:lnTo>
-                    <a:pt x="2506788" y="38591"/>
-                  </a:lnTo>
-                  <a:lnTo>
-                    <a:pt x="2435165" y="37512"/>
-                  </a:lnTo>
-                  <a:lnTo>
-                    <a:pt x="2363543" y="36432"/>
-                  </a:lnTo>
-                  <a:lnTo>
-                    <a:pt x="2291920" y="35350"/>
-                  </a:lnTo>
-                  <a:lnTo>
-                    <a:pt x="2220298" y="34268"/>
-                  </a:lnTo>
-                  <a:lnTo>
-                    <a:pt x="2148675" y="33183"/>
-                  </a:lnTo>
-                  <a:lnTo>
-                    <a:pt x="2077053" y="32098"/>
-                  </a:lnTo>
-                  <a:lnTo>
-                    <a:pt x="2005430" y="31011"/>
-                  </a:lnTo>
-                  <a:lnTo>
-                    <a:pt x="1933808" y="29922"/>
-                  </a:lnTo>
-                  <a:lnTo>
-                    <a:pt x="1862185" y="28832"/>
-                  </a:lnTo>
-                  <a:lnTo>
-                    <a:pt x="1790563" y="27741"/>
-                  </a:lnTo>
-                  <a:lnTo>
-                    <a:pt x="1718940" y="26649"/>
-                  </a:lnTo>
-                  <a:lnTo>
-                    <a:pt x="1647318" y="25555"/>
-                  </a:lnTo>
-                  <a:lnTo>
-                    <a:pt x="1575695" y="24459"/>
-                  </a:lnTo>
-                  <a:lnTo>
-                    <a:pt x="1504073" y="23362"/>
-                  </a:lnTo>
-                  <a:lnTo>
-                    <a:pt x="1432450" y="22264"/>
-                  </a:lnTo>
-                  <a:lnTo>
-                    <a:pt x="1360827" y="21164"/>
-                  </a:lnTo>
-                  <a:lnTo>
-                    <a:pt x="1289205" y="20063"/>
-                  </a:lnTo>
-                  <a:lnTo>
-                    <a:pt x="1217582" y="18961"/>
-                  </a:lnTo>
-                  <a:lnTo>
-                    <a:pt x="1145960" y="17857"/>
-                  </a:lnTo>
-                  <a:lnTo>
-                    <a:pt x="1074337" y="16751"/>
-                  </a:lnTo>
-                  <a:lnTo>
-                    <a:pt x="1002715" y="15645"/>
-                  </a:lnTo>
-                  <a:lnTo>
-                    <a:pt x="931092" y="14537"/>
-                  </a:lnTo>
-                  <a:lnTo>
-                    <a:pt x="859470" y="13427"/>
-                  </a:lnTo>
-                  <a:lnTo>
-                    <a:pt x="787847" y="12316"/>
-                  </a:lnTo>
-                  <a:lnTo>
-                    <a:pt x="716225" y="11203"/>
-                  </a:lnTo>
-                  <a:lnTo>
-                    <a:pt x="644602" y="10089"/>
-                  </a:lnTo>
-                  <a:lnTo>
-                    <a:pt x="572980" y="8974"/>
-                  </a:lnTo>
-                  <a:lnTo>
-                    <a:pt x="501357" y="7857"/>
-                  </a:lnTo>
-                  <a:lnTo>
-                    <a:pt x="429735" y="6739"/>
-                  </a:lnTo>
-                  <a:lnTo>
-                    <a:pt x="358112" y="5619"/>
-                  </a:lnTo>
-                  <a:lnTo>
-                    <a:pt x="286490" y="4498"/>
-                  </a:lnTo>
-                  <a:lnTo>
-                    <a:pt x="214867" y="3376"/>
-                  </a:lnTo>
-                  <a:lnTo>
-                    <a:pt x="143245" y="2252"/>
-                  </a:lnTo>
-                  <a:lnTo>
-                    <a:pt x="71622" y="1126"/>
+                    <a:pt x="7019007" y="875810"/>
+                  </a:lnTo>
+                  <a:lnTo>
+                    <a:pt x="6947385" y="875652"/>
+                  </a:lnTo>
+                  <a:lnTo>
+                    <a:pt x="6875762" y="875473"/>
+                  </a:lnTo>
+                  <a:lnTo>
+                    <a:pt x="6804139" y="875272"/>
+                  </a:lnTo>
+                  <a:lnTo>
+                    <a:pt x="6732517" y="875045"/>
+                  </a:lnTo>
+                  <a:lnTo>
+                    <a:pt x="6660894" y="874790"/>
+                  </a:lnTo>
+                  <a:lnTo>
+                    <a:pt x="6589272" y="874503"/>
+                  </a:lnTo>
+                  <a:lnTo>
+                    <a:pt x="6517649" y="874179"/>
+                  </a:lnTo>
+                  <a:lnTo>
+                    <a:pt x="6446027" y="873815"/>
+                  </a:lnTo>
+                  <a:lnTo>
+                    <a:pt x="6374404" y="873404"/>
+                  </a:lnTo>
+                  <a:lnTo>
+                    <a:pt x="6302782" y="872942"/>
+                  </a:lnTo>
+                  <a:lnTo>
+                    <a:pt x="6231159" y="872421"/>
+                  </a:lnTo>
+                  <a:lnTo>
+                    <a:pt x="6159537" y="871835"/>
+                  </a:lnTo>
+                  <a:lnTo>
+                    <a:pt x="6087914" y="871175"/>
+                  </a:lnTo>
+                  <a:lnTo>
+                    <a:pt x="6016292" y="870431"/>
+                  </a:lnTo>
+                  <a:lnTo>
+                    <a:pt x="5944669" y="869594"/>
+                  </a:lnTo>
+                  <a:lnTo>
+                    <a:pt x="5873047" y="868651"/>
+                  </a:lnTo>
+                  <a:lnTo>
+                    <a:pt x="5801424" y="867588"/>
+                  </a:lnTo>
+                  <a:lnTo>
+                    <a:pt x="5729802" y="866392"/>
+                  </a:lnTo>
+                  <a:lnTo>
+                    <a:pt x="5658179" y="865045"/>
+                  </a:lnTo>
+                  <a:lnTo>
+                    <a:pt x="5586557" y="863528"/>
+                  </a:lnTo>
+                  <a:lnTo>
+                    <a:pt x="5514934" y="861819"/>
+                  </a:lnTo>
+                  <a:lnTo>
+                    <a:pt x="5443311" y="859895"/>
+                  </a:lnTo>
+                  <a:lnTo>
+                    <a:pt x="5371689" y="857727"/>
+                  </a:lnTo>
+                  <a:lnTo>
+                    <a:pt x="5300066" y="855287"/>
+                  </a:lnTo>
+                  <a:lnTo>
+                    <a:pt x="5228444" y="852538"/>
+                  </a:lnTo>
+                  <a:lnTo>
+                    <a:pt x="5156821" y="849442"/>
+                  </a:lnTo>
+                  <a:lnTo>
+                    <a:pt x="5085199" y="845956"/>
+                  </a:lnTo>
+                  <a:lnTo>
+                    <a:pt x="5013576" y="842030"/>
+                  </a:lnTo>
+                  <a:lnTo>
+                    <a:pt x="4941954" y="837608"/>
+                  </a:lnTo>
+                  <a:lnTo>
+                    <a:pt x="4870331" y="832628"/>
+                  </a:lnTo>
+                  <a:lnTo>
+                    <a:pt x="4798709" y="827020"/>
+                  </a:lnTo>
+                  <a:lnTo>
+                    <a:pt x="4727086" y="820704"/>
+                  </a:lnTo>
+                  <a:lnTo>
+                    <a:pt x="4655464" y="813590"/>
+                  </a:lnTo>
+                  <a:lnTo>
+                    <a:pt x="4583841" y="805579"/>
+                  </a:lnTo>
+                  <a:lnTo>
+                    <a:pt x="4512219" y="796557"/>
+                  </a:lnTo>
+                  <a:lnTo>
+                    <a:pt x="4440596" y="786397"/>
+                  </a:lnTo>
+                  <a:lnTo>
+                    <a:pt x="4368974" y="774954"/>
+                  </a:lnTo>
+                  <a:lnTo>
+                    <a:pt x="4297351" y="762067"/>
+                  </a:lnTo>
+                  <a:lnTo>
+                    <a:pt x="4225729" y="747553"/>
+                  </a:lnTo>
+                  <a:lnTo>
+                    <a:pt x="4154106" y="731208"/>
+                  </a:lnTo>
+                  <a:lnTo>
+                    <a:pt x="4082483" y="712800"/>
+                  </a:lnTo>
+                  <a:lnTo>
+                    <a:pt x="4010861" y="692069"/>
+                  </a:lnTo>
+                  <a:lnTo>
+                    <a:pt x="3939238" y="668722"/>
+                  </a:lnTo>
+                  <a:lnTo>
+                    <a:pt x="3867616" y="642428"/>
+                  </a:lnTo>
+                  <a:lnTo>
+                    <a:pt x="3795993" y="612816"/>
+                  </a:lnTo>
+                  <a:lnTo>
+                    <a:pt x="3724371" y="579466"/>
+                  </a:lnTo>
+                  <a:lnTo>
+                    <a:pt x="3652748" y="541908"/>
+                  </a:lnTo>
+                  <a:lnTo>
+                    <a:pt x="3581126" y="499609"/>
+                  </a:lnTo>
+                  <a:lnTo>
+                    <a:pt x="3509503" y="451973"/>
+                  </a:lnTo>
+                  <a:lnTo>
+                    <a:pt x="3437881" y="398324"/>
+                  </a:lnTo>
+                  <a:lnTo>
+                    <a:pt x="3366258" y="337905"/>
+                  </a:lnTo>
+                  <a:lnTo>
+                    <a:pt x="3294636" y="269861"/>
+                  </a:lnTo>
+                  <a:lnTo>
+                    <a:pt x="3223013" y="193229"/>
+                  </a:lnTo>
+                  <a:lnTo>
+                    <a:pt x="3151391" y="106926"/>
+                  </a:lnTo>
+                  <a:lnTo>
+                    <a:pt x="3079768" y="47202"/>
+                  </a:lnTo>
+                  <a:lnTo>
+                    <a:pt x="3008146" y="46134"/>
+                  </a:lnTo>
+                  <a:lnTo>
+                    <a:pt x="2936523" y="45064"/>
+                  </a:lnTo>
+                  <a:lnTo>
+                    <a:pt x="2864901" y="43993"/>
+                  </a:lnTo>
+                  <a:lnTo>
+                    <a:pt x="2793278" y="42921"/>
+                  </a:lnTo>
+                  <a:lnTo>
+                    <a:pt x="2721655" y="41847"/>
+                  </a:lnTo>
+                  <a:lnTo>
+                    <a:pt x="2650033" y="40772"/>
+                  </a:lnTo>
+                  <a:lnTo>
+                    <a:pt x="2578410" y="39695"/>
+                  </a:lnTo>
+                  <a:lnTo>
+                    <a:pt x="2506788" y="38617"/>
+                  </a:lnTo>
+                  <a:lnTo>
+                    <a:pt x="2435165" y="37538"/>
+                  </a:lnTo>
+                  <a:lnTo>
+                    <a:pt x="2363543" y="36457"/>
+                  </a:lnTo>
+                  <a:lnTo>
+                    <a:pt x="2291920" y="35375"/>
+                  </a:lnTo>
+                  <a:lnTo>
+                    <a:pt x="2220298" y="34291"/>
+                  </a:lnTo>
+                  <a:lnTo>
+                    <a:pt x="2148675" y="33206"/>
+                  </a:lnTo>
+                  <a:lnTo>
+                    <a:pt x="2077053" y="32120"/>
+                  </a:lnTo>
+                  <a:lnTo>
+                    <a:pt x="2005430" y="31032"/>
+                  </a:lnTo>
+                  <a:lnTo>
+                    <a:pt x="1933808" y="29943"/>
+                  </a:lnTo>
+                  <a:lnTo>
+                    <a:pt x="1862185" y="28852"/>
+                  </a:lnTo>
+                  <a:lnTo>
+                    <a:pt x="1790563" y="27760"/>
+                  </a:lnTo>
+                  <a:lnTo>
+                    <a:pt x="1718940" y="26667"/>
+                  </a:lnTo>
+                  <a:lnTo>
+                    <a:pt x="1647318" y="25572"/>
+                  </a:lnTo>
+                  <a:lnTo>
+                    <a:pt x="1575695" y="24476"/>
+                  </a:lnTo>
+                  <a:lnTo>
+                    <a:pt x="1504073" y="23378"/>
+                  </a:lnTo>
+                  <a:lnTo>
+                    <a:pt x="1432450" y="22279"/>
+                  </a:lnTo>
+                  <a:lnTo>
+                    <a:pt x="1360827" y="21179"/>
+                  </a:lnTo>
+                  <a:lnTo>
+                    <a:pt x="1289205" y="20077"/>
+                  </a:lnTo>
+                  <a:lnTo>
+                    <a:pt x="1217582" y="18974"/>
+                  </a:lnTo>
+                  <a:lnTo>
+                    <a:pt x="1145960" y="17869"/>
+                  </a:lnTo>
+                  <a:lnTo>
+                    <a:pt x="1074337" y="16763"/>
+                  </a:lnTo>
+                  <a:lnTo>
+                    <a:pt x="1002715" y="15655"/>
+                  </a:lnTo>
+                  <a:lnTo>
+                    <a:pt x="931092" y="14547"/>
+                  </a:lnTo>
+                  <a:lnTo>
+                    <a:pt x="859470" y="13436"/>
+                  </a:lnTo>
+                  <a:lnTo>
+                    <a:pt x="787847" y="12324"/>
+                  </a:lnTo>
+                  <a:lnTo>
+                    <a:pt x="716225" y="11211"/>
+                  </a:lnTo>
+                  <a:lnTo>
+                    <a:pt x="644602" y="10096"/>
+                  </a:lnTo>
+                  <a:lnTo>
+                    <a:pt x="572980" y="8980"/>
+                  </a:lnTo>
+                  <a:lnTo>
+                    <a:pt x="501357" y="7863"/>
+                  </a:lnTo>
+                  <a:lnTo>
+                    <a:pt x="429735" y="6744"/>
+                  </a:lnTo>
+                  <a:lnTo>
+                    <a:pt x="358112" y="5623"/>
+                  </a:lnTo>
+                  <a:lnTo>
+                    <a:pt x="286490" y="4501"/>
+                  </a:lnTo>
+                  <a:lnTo>
+                    <a:pt x="214867" y="3378"/>
+                  </a:lnTo>
+                  <a:lnTo>
+                    <a:pt x="143245" y="2253"/>
+                  </a:lnTo>
+                  <a:lnTo>
+                    <a:pt x="71622" y="1127"/>
                   </a:lnTo>
                   <a:lnTo>
                     <a:pt x="0" y="0"/>
@@ -4493,255 +4487,255 @@
           </p:nvSpPr>
           <p:spPr>
             <a:xfrm>
-              <a:off x="2543125" y="2073503"/>
-              <a:ext cx="5719553" cy="3454962"/>
+              <a:off x="2568169" y="2073503"/>
+              <a:ext cx="5694509" cy="3454392"/>
             </a:xfrm>
             <a:custGeom>
               <a:avLst/>
               <a:pathLst>
-                <a:path w="5719553" h="3454962">
+                <a:path w="5694509" h="3454392">
                   <a:moveTo>
                     <a:pt x="0" y="0"/>
                   </a:moveTo>
                   <a:lnTo>
-                    <a:pt x="61374" y="175466"/>
-                  </a:lnTo>
-                  <a:lnTo>
-                    <a:pt x="132996" y="368296"/>
-                  </a:lnTo>
-                  <a:lnTo>
-                    <a:pt x="204619" y="549887"/>
-                  </a:lnTo>
-                  <a:lnTo>
-                    <a:pt x="276241" y="720893"/>
-                  </a:lnTo>
-                  <a:lnTo>
-                    <a:pt x="347864" y="881932"/>
-                  </a:lnTo>
-                  <a:lnTo>
-                    <a:pt x="419486" y="1033585"/>
-                  </a:lnTo>
-                  <a:lnTo>
-                    <a:pt x="491109" y="1176398"/>
-                  </a:lnTo>
-                  <a:lnTo>
-                    <a:pt x="562731" y="1310887"/>
-                  </a:lnTo>
-                  <a:lnTo>
-                    <a:pt x="634354" y="1437536"/>
-                  </a:lnTo>
-                  <a:lnTo>
-                    <a:pt x="705977" y="1556804"/>
-                  </a:lnTo>
-                  <a:lnTo>
-                    <a:pt x="777599" y="1669120"/>
-                  </a:lnTo>
-                  <a:lnTo>
-                    <a:pt x="849222" y="1774890"/>
-                  </a:lnTo>
-                  <a:lnTo>
-                    <a:pt x="920844" y="1874494"/>
-                  </a:lnTo>
-                  <a:lnTo>
-                    <a:pt x="992467" y="1968293"/>
-                  </a:lnTo>
-                  <a:lnTo>
-                    <a:pt x="1064089" y="2056624"/>
-                  </a:lnTo>
-                  <a:lnTo>
-                    <a:pt x="1135712" y="2139807"/>
-                  </a:lnTo>
-                  <a:lnTo>
-                    <a:pt x="1207334" y="2218142"/>
-                  </a:lnTo>
-                  <a:lnTo>
-                    <a:pt x="1278957" y="2291910"/>
-                  </a:lnTo>
-                  <a:lnTo>
-                    <a:pt x="1350579" y="2361379"/>
-                  </a:lnTo>
-                  <a:lnTo>
-                    <a:pt x="1422202" y="2426799"/>
-                  </a:lnTo>
-                  <a:lnTo>
-                    <a:pt x="1493824" y="2488405"/>
-                  </a:lnTo>
-                  <a:lnTo>
-                    <a:pt x="1565447" y="2546421"/>
-                  </a:lnTo>
-                  <a:lnTo>
-                    <a:pt x="1637069" y="2601055"/>
-                  </a:lnTo>
-                  <a:lnTo>
-                    <a:pt x="1708692" y="2652504"/>
-                  </a:lnTo>
-                  <a:lnTo>
-                    <a:pt x="1780314" y="2700955"/>
-                  </a:lnTo>
-                  <a:lnTo>
-                    <a:pt x="1851937" y="2746582"/>
-                  </a:lnTo>
-                  <a:lnTo>
-                    <a:pt x="1923559" y="2789549"/>
-                  </a:lnTo>
-                  <a:lnTo>
-                    <a:pt x="1995182" y="2830012"/>
-                  </a:lnTo>
-                  <a:lnTo>
-                    <a:pt x="2066805" y="2868116"/>
-                  </a:lnTo>
-                  <a:lnTo>
-                    <a:pt x="2138427" y="2904000"/>
-                  </a:lnTo>
-                  <a:lnTo>
-                    <a:pt x="2210050" y="2937791"/>
-                  </a:lnTo>
-                  <a:lnTo>
-                    <a:pt x="2281672" y="2969614"/>
-                  </a:lnTo>
-                  <a:lnTo>
-                    <a:pt x="2353295" y="2999581"/>
-                  </a:lnTo>
-                  <a:lnTo>
-                    <a:pt x="2424917" y="3027802"/>
-                  </a:lnTo>
-                  <a:lnTo>
-                    <a:pt x="2496540" y="3054377"/>
-                  </a:lnTo>
-                  <a:lnTo>
-                    <a:pt x="2568162" y="3079404"/>
-                  </a:lnTo>
-                  <a:lnTo>
-                    <a:pt x="2639785" y="3102972"/>
-                  </a:lnTo>
-                  <a:lnTo>
-                    <a:pt x="2711407" y="3125166"/>
-                  </a:lnTo>
-                  <a:lnTo>
-                    <a:pt x="2783030" y="3146067"/>
-                  </a:lnTo>
-                  <a:lnTo>
-                    <a:pt x="2854652" y="3165749"/>
-                  </a:lnTo>
-                  <a:lnTo>
-                    <a:pt x="2926275" y="3184284"/>
-                  </a:lnTo>
-                  <a:lnTo>
-                    <a:pt x="2997897" y="3201739"/>
-                  </a:lnTo>
-                  <a:lnTo>
-                    <a:pt x="3069520" y="3218177"/>
-                  </a:lnTo>
-                  <a:lnTo>
-                    <a:pt x="3141142" y="3233656"/>
-                  </a:lnTo>
-                  <a:lnTo>
-                    <a:pt x="3212765" y="3248233"/>
-                  </a:lnTo>
-                  <a:lnTo>
-                    <a:pt x="3284387" y="3261960"/>
-                  </a:lnTo>
-                  <a:lnTo>
-                    <a:pt x="3356010" y="3274888"/>
-                  </a:lnTo>
-                  <a:lnTo>
-                    <a:pt x="3427633" y="3287062"/>
-                  </a:lnTo>
-                  <a:lnTo>
-                    <a:pt x="3499255" y="3298526"/>
-                  </a:lnTo>
-                  <a:lnTo>
-                    <a:pt x="3570878" y="3309322"/>
-                  </a:lnTo>
-                  <a:lnTo>
-                    <a:pt x="3642500" y="3319488"/>
-                  </a:lnTo>
-                  <a:lnTo>
-                    <a:pt x="3714123" y="3329063"/>
-                  </a:lnTo>
-                  <a:lnTo>
-                    <a:pt x="3785745" y="3338079"/>
-                  </a:lnTo>
-                  <a:lnTo>
-                    <a:pt x="3857368" y="3346569"/>
-                  </a:lnTo>
-                  <a:lnTo>
-                    <a:pt x="3928990" y="3354565"/>
-                  </a:lnTo>
-                  <a:lnTo>
-                    <a:pt x="4000613" y="3362095"/>
-                  </a:lnTo>
-                  <a:lnTo>
-                    <a:pt x="4072235" y="3369185"/>
-                  </a:lnTo>
-                  <a:lnTo>
-                    <a:pt x="4143858" y="3375863"/>
-                  </a:lnTo>
-                  <a:lnTo>
-                    <a:pt x="4215480" y="3382151"/>
-                  </a:lnTo>
-                  <a:lnTo>
-                    <a:pt x="4287103" y="3388073"/>
-                  </a:lnTo>
-                  <a:lnTo>
-                    <a:pt x="4358725" y="3393649"/>
-                  </a:lnTo>
-                  <a:lnTo>
-                    <a:pt x="4430348" y="3398901"/>
-                  </a:lnTo>
-                  <a:lnTo>
-                    <a:pt x="4501970" y="3403846"/>
-                  </a:lnTo>
-                  <a:lnTo>
-                    <a:pt x="4573593" y="3408503"/>
-                  </a:lnTo>
-                  <a:lnTo>
-                    <a:pt x="4645215" y="3412889"/>
-                  </a:lnTo>
-                  <a:lnTo>
-                    <a:pt x="4716838" y="3417019"/>
-                  </a:lnTo>
-                  <a:lnTo>
-                    <a:pt x="4788461" y="3420908"/>
-                  </a:lnTo>
-                  <a:lnTo>
-                    <a:pt x="4860083" y="3424571"/>
-                  </a:lnTo>
-                  <a:lnTo>
-                    <a:pt x="4931706" y="3428020"/>
-                  </a:lnTo>
-                  <a:lnTo>
-                    <a:pt x="5003328" y="3431268"/>
-                  </a:lnTo>
-                  <a:lnTo>
-                    <a:pt x="5074951" y="3434327"/>
-                  </a:lnTo>
-                  <a:lnTo>
-                    <a:pt x="5146573" y="3437208"/>
-                  </a:lnTo>
-                  <a:lnTo>
-                    <a:pt x="5218196" y="3439920"/>
-                  </a:lnTo>
-                  <a:lnTo>
-                    <a:pt x="5289818" y="3442475"/>
-                  </a:lnTo>
-                  <a:lnTo>
-                    <a:pt x="5361441" y="3444880"/>
-                  </a:lnTo>
-                  <a:lnTo>
-                    <a:pt x="5433063" y="3447146"/>
-                  </a:lnTo>
-                  <a:lnTo>
-                    <a:pt x="5504686" y="3449279"/>
-                  </a:lnTo>
-                  <a:lnTo>
-                    <a:pt x="5576308" y="3451288"/>
-                  </a:lnTo>
-                  <a:lnTo>
-                    <a:pt x="5647931" y="3453180"/>
-                  </a:lnTo>
-                  <a:lnTo>
-                    <a:pt x="5719553" y="3454962"/>
+                    <a:pt x="36329" y="106070"/>
+                  </a:lnTo>
+                  <a:lnTo>
+                    <a:pt x="107952" y="302992"/>
+                  </a:lnTo>
+                  <a:lnTo>
+                    <a:pt x="179574" y="488433"/>
+                  </a:lnTo>
+                  <a:lnTo>
+                    <a:pt x="251197" y="663063"/>
+                  </a:lnTo>
+                  <a:lnTo>
+                    <a:pt x="322820" y="827511"/>
+                  </a:lnTo>
+                  <a:lnTo>
+                    <a:pt x="394442" y="982372"/>
+                  </a:lnTo>
+                  <a:lnTo>
+                    <a:pt x="466065" y="1128205"/>
+                  </a:lnTo>
+                  <a:lnTo>
+                    <a:pt x="537687" y="1265535"/>
+                  </a:lnTo>
+                  <a:lnTo>
+                    <a:pt x="609310" y="1394859"/>
+                  </a:lnTo>
+                  <a:lnTo>
+                    <a:pt x="680932" y="1516643"/>
+                  </a:lnTo>
+                  <a:lnTo>
+                    <a:pt x="752555" y="1631327"/>
+                  </a:lnTo>
+                  <a:lnTo>
+                    <a:pt x="824177" y="1739325"/>
+                  </a:lnTo>
+                  <a:lnTo>
+                    <a:pt x="895800" y="1841026"/>
+                  </a:lnTo>
+                  <a:lnTo>
+                    <a:pt x="967422" y="1936798"/>
+                  </a:lnTo>
+                  <a:lnTo>
+                    <a:pt x="1039045" y="2026987"/>
+                  </a:lnTo>
+                  <a:lnTo>
+                    <a:pt x="1110667" y="2111917"/>
+                  </a:lnTo>
+                  <a:lnTo>
+                    <a:pt x="1182290" y="2191896"/>
+                  </a:lnTo>
+                  <a:lnTo>
+                    <a:pt x="1253912" y="2267212"/>
+                  </a:lnTo>
+                  <a:lnTo>
+                    <a:pt x="1325535" y="2338137"/>
+                  </a:lnTo>
+                  <a:lnTo>
+                    <a:pt x="1397157" y="2404927"/>
+                  </a:lnTo>
+                  <a:lnTo>
+                    <a:pt x="1468780" y="2467824"/>
+                  </a:lnTo>
+                  <a:lnTo>
+                    <a:pt x="1540402" y="2527053"/>
+                  </a:lnTo>
+                  <a:lnTo>
+                    <a:pt x="1612025" y="2582829"/>
+                  </a:lnTo>
+                  <a:lnTo>
+                    <a:pt x="1683648" y="2635353"/>
+                  </a:lnTo>
+                  <a:lnTo>
+                    <a:pt x="1755270" y="2684815"/>
+                  </a:lnTo>
+                  <a:lnTo>
+                    <a:pt x="1826893" y="2731394"/>
+                  </a:lnTo>
+                  <a:lnTo>
+                    <a:pt x="1898515" y="2775257"/>
+                  </a:lnTo>
+                  <a:lnTo>
+                    <a:pt x="1970138" y="2816562"/>
+                  </a:lnTo>
+                  <a:lnTo>
+                    <a:pt x="2041760" y="2855460"/>
+                  </a:lnTo>
+                  <a:lnTo>
+                    <a:pt x="2113383" y="2892090"/>
+                  </a:lnTo>
+                  <a:lnTo>
+                    <a:pt x="2185005" y="2926584"/>
+                  </a:lnTo>
+                  <a:lnTo>
+                    <a:pt x="2256628" y="2959067"/>
+                  </a:lnTo>
+                  <a:lnTo>
+                    <a:pt x="2328250" y="2989656"/>
+                  </a:lnTo>
+                  <a:lnTo>
+                    <a:pt x="2399873" y="3018462"/>
+                  </a:lnTo>
+                  <a:lnTo>
+                    <a:pt x="2471495" y="3045589"/>
+                  </a:lnTo>
+                  <a:lnTo>
+                    <a:pt x="2543118" y="3071134"/>
+                  </a:lnTo>
+                  <a:lnTo>
+                    <a:pt x="2614740" y="3095189"/>
+                  </a:lnTo>
+                  <a:lnTo>
+                    <a:pt x="2686363" y="3117843"/>
+                  </a:lnTo>
+                  <a:lnTo>
+                    <a:pt x="2757985" y="3139175"/>
+                  </a:lnTo>
+                  <a:lnTo>
+                    <a:pt x="2829608" y="3159264"/>
+                  </a:lnTo>
+                  <a:lnTo>
+                    <a:pt x="2901230" y="3178182"/>
+                  </a:lnTo>
+                  <a:lnTo>
+                    <a:pt x="2972853" y="3195996"/>
+                  </a:lnTo>
+                  <a:lnTo>
+                    <a:pt x="3044476" y="3212772"/>
+                  </a:lnTo>
+                  <a:lnTo>
+                    <a:pt x="3116098" y="3228570"/>
+                  </a:lnTo>
+                  <a:lnTo>
+                    <a:pt x="3187721" y="3243447"/>
+                  </a:lnTo>
+                  <a:lnTo>
+                    <a:pt x="3259343" y="3257457"/>
+                  </a:lnTo>
+                  <a:lnTo>
+                    <a:pt x="3330966" y="3270650"/>
+                  </a:lnTo>
+                  <a:lnTo>
+                    <a:pt x="3402588" y="3283074"/>
+                  </a:lnTo>
+                  <a:lnTo>
+                    <a:pt x="3474211" y="3294773"/>
+                  </a:lnTo>
+                  <a:lnTo>
+                    <a:pt x="3545833" y="3305790"/>
+                  </a:lnTo>
+                  <a:lnTo>
+                    <a:pt x="3617456" y="3316165"/>
+                  </a:lnTo>
+                  <a:lnTo>
+                    <a:pt x="3689078" y="3325936"/>
+                  </a:lnTo>
+                  <a:lnTo>
+                    <a:pt x="3760701" y="3335136"/>
+                  </a:lnTo>
+                  <a:lnTo>
+                    <a:pt x="3832323" y="3343800"/>
+                  </a:lnTo>
+                  <a:lnTo>
+                    <a:pt x="3903946" y="3351959"/>
+                  </a:lnTo>
+                  <a:lnTo>
+                    <a:pt x="3975568" y="3359642"/>
+                  </a:lnTo>
+                  <a:lnTo>
+                    <a:pt x="4047191" y="3366878"/>
+                  </a:lnTo>
+                  <a:lnTo>
+                    <a:pt x="4118813" y="3373691"/>
+                  </a:lnTo>
+                  <a:lnTo>
+                    <a:pt x="4190436" y="3380108"/>
+                  </a:lnTo>
+                  <a:lnTo>
+                    <a:pt x="4262058" y="3386150"/>
+                  </a:lnTo>
+                  <a:lnTo>
+                    <a:pt x="4333681" y="3391840"/>
+                  </a:lnTo>
+                  <a:lnTo>
+                    <a:pt x="4405304" y="3397198"/>
+                  </a:lnTo>
+                  <a:lnTo>
+                    <a:pt x="4476926" y="3402244"/>
+                  </a:lnTo>
+                  <a:lnTo>
+                    <a:pt x="4548549" y="3406996"/>
+                  </a:lnTo>
+                  <a:lnTo>
+                    <a:pt x="4620171" y="3411470"/>
+                  </a:lnTo>
+                  <a:lnTo>
+                    <a:pt x="4691794" y="3415684"/>
+                  </a:lnTo>
+                  <a:lnTo>
+                    <a:pt x="4763416" y="3419652"/>
+                  </a:lnTo>
+                  <a:lnTo>
+                    <a:pt x="4835039" y="3423389"/>
+                  </a:lnTo>
+                  <a:lnTo>
+                    <a:pt x="4906661" y="3426908"/>
+                  </a:lnTo>
+                  <a:lnTo>
+                    <a:pt x="4978284" y="3430222"/>
+                  </a:lnTo>
+                  <a:lnTo>
+                    <a:pt x="5049906" y="3433342"/>
+                  </a:lnTo>
+                  <a:lnTo>
+                    <a:pt x="5121529" y="3436281"/>
+                  </a:lnTo>
+                  <a:lnTo>
+                    <a:pt x="5193151" y="3439048"/>
+                  </a:lnTo>
+                  <a:lnTo>
+                    <a:pt x="5264774" y="3441654"/>
+                  </a:lnTo>
+                  <a:lnTo>
+                    <a:pt x="5336396" y="3444108"/>
+                  </a:lnTo>
+                  <a:lnTo>
+                    <a:pt x="5408019" y="3446419"/>
+                  </a:lnTo>
+                  <a:lnTo>
+                    <a:pt x="5479641" y="3448595"/>
+                  </a:lnTo>
+                  <a:lnTo>
+                    <a:pt x="5551264" y="3450645"/>
+                  </a:lnTo>
+                  <a:lnTo>
+                    <a:pt x="5622886" y="3452574"/>
+                  </a:lnTo>
+                  <a:lnTo>
+                    <a:pt x="5694509" y="3454392"/>
                   </a:lnTo>
                 </a:path>
               </a:pathLst>
@@ -4813,7 +4807,7 @@
           </p:nvSpPr>
           <p:spPr>
             <a:xfrm>
-              <a:off x="4254372" y="2073503"/>
+              <a:off x="4278722" y="2073503"/>
               <a:ext cx="0" cy="3649639"/>
             </a:xfrm>
             <a:custGeom>
@@ -5086,7 +5080,7 @@
           </p:nvSpPr>
           <p:spPr>
             <a:xfrm>
-              <a:off x="1347083" y="5785772"/>
+              <a:off x="1347751" y="5785772"/>
               <a:ext cx="161574" cy="80101"/>
             </a:xfrm>
             <a:prstGeom prst="rect">
@@ -5132,7 +5126,7 @@
           </p:nvSpPr>
           <p:spPr>
             <a:xfrm>
-              <a:off x="2254916" y="5785772"/>
+              <a:off x="2255364" y="5785772"/>
               <a:ext cx="161574" cy="80101"/>
             </a:xfrm>
             <a:prstGeom prst="rect">
@@ -5178,7 +5172,7 @@
           </p:nvSpPr>
           <p:spPr>
             <a:xfrm>
-              <a:off x="3162750" y="5785772"/>
+              <a:off x="3162976" y="5785772"/>
               <a:ext cx="161574" cy="80101"/>
             </a:xfrm>
             <a:prstGeom prst="rect">
@@ -5224,7 +5218,7 @@
           </p:nvSpPr>
           <p:spPr>
             <a:xfrm>
-              <a:off x="4120281" y="5785772"/>
+              <a:off x="4120286" y="5785772"/>
               <a:ext cx="62179" cy="80101"/>
             </a:xfrm>
             <a:prstGeom prst="rect">
@@ -5270,7 +5264,7 @@
           </p:nvSpPr>
           <p:spPr>
             <a:xfrm>
-              <a:off x="4997024" y="5785772"/>
+              <a:off x="4996809" y="5785772"/>
               <a:ext cx="124358" cy="80101"/>
             </a:xfrm>
             <a:prstGeom prst="rect">
@@ -5316,7 +5310,7 @@
           </p:nvSpPr>
           <p:spPr>
             <a:xfrm>
-              <a:off x="5904858" y="5785772"/>
+              <a:off x="5904422" y="5785772"/>
               <a:ext cx="124358" cy="80101"/>
             </a:xfrm>
             <a:prstGeom prst="rect">
@@ -5362,7 +5356,7 @@
           </p:nvSpPr>
           <p:spPr>
             <a:xfrm>
-              <a:off x="6812691" y="5785772"/>
+              <a:off x="6812034" y="5785772"/>
               <a:ext cx="124358" cy="80101"/>
             </a:xfrm>
             <a:prstGeom prst="rect">
@@ -5408,7 +5402,7 @@
           </p:nvSpPr>
           <p:spPr>
             <a:xfrm>
-              <a:off x="7720525" y="5785772"/>
+              <a:off x="7719647" y="5785772"/>
               <a:ext cx="124358" cy="80101"/>
             </a:xfrm>
             <a:prstGeom prst="rect">
@@ -5579,7 +5573,7 @@
                   <a:latin typeface="Helvetica"/>
                   <a:cs typeface="Helvetica"/>
                 </a:rPr>
-                <a:t>subHR per 10 % decline: 2.14 (1.02-4.51), p_Bonf = 0.271 (n = 6)  |  per IQR decline (Δ = 26.4 %): 7.49 (1.04-53.70)  |  IQR: [-11.1, 15.3] %</a:t>
+                <a:t>subHR per 10 % decline: 2.14 (1.02-4.51), p_Bonf = 0.271 (n = 6)  |  per IQR decline (Δ = 26.4 %): 7.47 (1.04-53.40)  |  IQR: [-11.1, 15.4] %</a:t>
               </a:r>
             </a:p>
           </p:txBody>
